--- a/rendu_presentation_v2.pptx
+++ b/rendu_presentation_v2.pptx
@@ -5680,7 +5680,7 @@
                 </a:solidFill>
                 <a:latin typeface="Calibri"/>
               </a:rPr>
-              <a:t>Plus une compagnie fait de vols longue distance, plus ses vols sont en retard.</a:t>
+              <a:t>Les longs courriers composent la plus grande majorité des retards.</a:t>
             </a:r>
           </a:p>
         </p:txBody>
@@ -6021,30 +6021,6 @@
           </a:p>
         </p:txBody>
       </p:sp>
-      <p:pic>
-        <p:nvPicPr>
-          <p:cNvPr id="5" name="Picture 4" descr="pptx_image1.png"/>
-          <p:cNvPicPr>
-            <a:picLocks noChangeAspect="1"/>
-          </p:cNvPicPr>
-          <p:nvPr/>
-        </p:nvPicPr>
-        <p:blipFill>
-          <a:blip r:embed="rId2"/>
-          <a:stretch>
-            <a:fillRect/>
-          </a:stretch>
-        </p:blipFill>
-        <p:spPr>
-          <a:xfrm>
-            <a:off x="86265" y="294184"/>
-            <a:ext cx="12019164" cy="6481520"/>
-          </a:xfrm>
-          <a:prstGeom prst="rect">
-            <a:avLst/>
-          </a:prstGeom>
-        </p:spPr>
-      </p:pic>
       <p:sp>
         <p:nvSpPr>
           <p:cNvPr id="7" name="TextBox 6"/>
@@ -6084,6 +6060,30 @@
           </a:p>
         </p:txBody>
       </p:sp>
+      <p:pic>
+        <p:nvPicPr>
+          <p:cNvPr id="8" name="Picture 7" descr="capture_dashboard_v2_commit.png"/>
+          <p:cNvPicPr>
+            <a:picLocks noChangeAspect="1"/>
+          </p:cNvPicPr>
+          <p:nvPr/>
+        </p:nvPicPr>
+        <p:blipFill>
+          <a:blip r:embed="rId6"/>
+          <a:stretch>
+            <a:fillRect/>
+          </a:stretch>
+        </p:blipFill>
+        <p:spPr>
+          <a:xfrm>
+            <a:off x="334686" y="294184"/>
+            <a:ext cx="11522628" cy="6481520"/>
+          </a:xfrm>
+          <a:prstGeom prst="rect">
+            <a:avLst/>
+          </a:prstGeom>
+        </p:spPr>
+      </p:pic>
     </p:spTree>
   </p:cSld>
   <p:clrMapOvr>
@@ -6500,7 +6500,7 @@
                 </a:solidFill>
                 <a:latin typeface="Calibri"/>
               </a:rPr>
-              <a:t>NON VALIDÉE</a:t>
+              <a:t>RÉFUTÉE</a:t>
             </a:r>
           </a:p>
         </p:txBody>
@@ -6542,7 +6542,7 @@
                 </a:solidFill>
                 <a:latin typeface="Calibri"/>
               </a:rPr>
-              <a:t>La distance ne dégrade pas la ponctualité : les vols longs rattrapent jusqu'à 9 minutes en vol. C'est le modèle d'exploitation de la compagnie qui fait la différence.</a:t>
+              <a:t>Les vols longs ne portent que 13 % des retards — exactement leur part du trafic. La distance n'y change rien : les vols longs rattrapent jusqu'à 9 minutes en vol, et même les compagnies spécialisées ne sont pas plus en retard.</a:t>
             </a:r>
           </a:p>
         </p:txBody>

--- a/rendu_presentation_v2.pptx
+++ b/rendu_presentation_v2.pptx
@@ -6062,14 +6062,14 @@
       </p:sp>
       <p:pic>
         <p:nvPicPr>
-          <p:cNvPr id="8" name="Picture 7" descr="capture_dashboard_v2_commit.png"/>
+          <p:cNvPr id="8" name="Picture 7" descr="capture_finale_accents.png"/>
           <p:cNvPicPr>
             <a:picLocks noChangeAspect="1"/>
           </p:cNvPicPr>
           <p:nvPr/>
         </p:nvPicPr>
         <p:blipFill>
-          <a:blip r:embed="rId6"/>
+          <a:blip r:embed="rId3"/>
           <a:stretch>
             <a:fillRect/>
           </a:stretch>

--- a/rendu_presentation_v2.pptx
+++ b/rendu_presentation_v2.pptx
@@ -3468,7 +3468,7 @@
       </p:grpSpPr>
       <p:sp>
         <p:nvSpPr>
-          <p:cNvPr id="2" name="Rectangle 1"/>
+          <p:cNvPr id="35" name="Rectangle 34"/>
           <p:cNvSpPr/>
           <p:nvPr/>
         </p:nvSpPr>
@@ -3507,13 +3507,12 @@
           <a:lstStyle/>
           <a:p>
             <a:pPr algn="ctr"/>
-            <a:endParaRPr/>
-          </a:p>
-        </p:txBody>
-      </p:sp>
-      <p:sp>
-        <p:nvSpPr>
-          <p:cNvPr id="3" name="Rectangle 2"/>
+          </a:p>
+        </p:txBody>
+      </p:sp>
+      <p:sp>
+        <p:nvSpPr>
+          <p:cNvPr id="36" name="Rectangle 35"/>
           <p:cNvSpPr/>
           <p:nvPr/>
         </p:nvSpPr>
@@ -3552,7 +3551,6 @@
           <a:lstStyle/>
           <a:p>
             <a:pPr algn="ctr"/>
-            <a:endParaRPr/>
           </a:p>
         </p:txBody>
       </p:sp>
@@ -3636,279 +3634,14 @@
       </p:sp>
       <p:sp>
         <p:nvSpPr>
-          <p:cNvPr id="6" name="TextBox 5"/>
+          <p:cNvPr id="27" name="TextBox 26"/>
           <p:cNvSpPr txBox="1"/>
           <p:nvPr/>
         </p:nvSpPr>
         <p:spPr>
           <a:xfrm>
-            <a:off x="502920" y="1691640"/>
-            <a:ext cx="11155680" cy="2103120"/>
-          </a:xfrm>
-          <a:prstGeom prst="rect">
-            <a:avLst/>
-          </a:prstGeom>
-          <a:noFill/>
-        </p:spPr>
-        <p:txBody>
-          <a:bodyPr wrap="square" anchor="t">
-            <a:spAutoFit/>
-          </a:bodyPr>
-          <a:lstStyle/>
-          <a:p>
-            <a:pPr algn="l">
-              <a:lnSpc>
-                <a:spcPct val="112000"/>
-              </a:lnSpc>
-              <a:spcAft>
-                <a:spcPts val="1000"/>
-              </a:spcAft>
-            </a:pPr>
-            <a:r>
-              <a:rPr sz="1700" b="1" i="0">
-                <a:solidFill>
-                  <a:srgbClr val="0C8792"/>
-                </a:solidFill>
-                <a:latin typeface="Calibri"/>
-              </a:rPr>
-              <a:t>▪  </a:t>
-            </a:r>
-            <a:r>
-              <a:rPr sz="1700" b="1" i="0">
-                <a:solidFill>
-                  <a:srgbClr val="142128"/>
-                </a:solidFill>
-                <a:latin typeface="Calibri"/>
-              </a:rPr>
-              <a:t>Source officielle</a:t>
-            </a:r>
-            <a:r>
-              <a:rPr sz="1700" b="0" i="0">
-                <a:solidFill>
-                  <a:srgbClr val="142128"/>
-                </a:solidFill>
-                <a:latin typeface="Calibri"/>
-              </a:rPr>
-              <a:t> — « 2015 Flight Delays and Cancellations » (Kaggle), publié par le ministère américain des Transports (US DOT)</a:t>
-            </a:r>
-          </a:p>
-          <a:p>
-            <a:pPr algn="l">
-              <a:lnSpc>
-                <a:spcPct val="112000"/>
-              </a:lnSpc>
-              <a:spcAft>
-                <a:spcPts val="1000"/>
-              </a:spcAft>
-            </a:pPr>
-            <a:r>
-              <a:rPr sz="1700" b="1" i="0">
-                <a:solidFill>
-                  <a:srgbClr val="0C8792"/>
-                </a:solidFill>
-                <a:latin typeface="Calibri"/>
-              </a:rPr>
-              <a:t>▪  </a:t>
-            </a:r>
-            <a:r>
-              <a:rPr sz="1700" b="1" i="0">
-                <a:solidFill>
-                  <a:srgbClr val="142128"/>
-                </a:solidFill>
-                <a:latin typeface="Calibri"/>
-              </a:rPr>
-              <a:t>Périmètre</a:t>
-            </a:r>
-            <a:r>
-              <a:rPr sz="1700" b="0" i="0">
-                <a:solidFill>
-                  <a:srgbClr val="142128"/>
-                </a:solidFill>
-                <a:latin typeface="Calibri"/>
-              </a:rPr>
-              <a:t> — tous les vols intérieurs américains de l'année 2015, 12 mois complets</a:t>
-            </a:r>
-          </a:p>
-          <a:p>
-            <a:pPr algn="l">
-              <a:lnSpc>
-                <a:spcPct val="112000"/>
-              </a:lnSpc>
-              <a:spcAft>
-                <a:spcPts val="1000"/>
-              </a:spcAft>
-            </a:pPr>
-            <a:r>
-              <a:rPr sz="1700" b="1" i="0">
-                <a:solidFill>
-                  <a:srgbClr val="0C8792"/>
-                </a:solidFill>
-                <a:latin typeface="Calibri"/>
-              </a:rPr>
-              <a:t>▪  </a:t>
-            </a:r>
-            <a:r>
-              <a:rPr sz="1700" b="1" i="0">
-                <a:solidFill>
-                  <a:srgbClr val="142128"/>
-                </a:solidFill>
-                <a:latin typeface="Calibri"/>
-              </a:rPr>
-              <a:t>Une ligne = un vol programmé</a:t>
-            </a:r>
-            <a:r>
-              <a:rPr sz="1700" b="0" i="0">
-                <a:solidFill>
-                  <a:srgbClr val="142128"/>
-                </a:solidFill>
-                <a:latin typeface="Calibri"/>
-              </a:rPr>
-              <a:t> — date, compagnie, aéroports de départ et d'arrivée, horaires, retard, annulation et son motif</a:t>
-            </a:r>
-          </a:p>
-          <a:p>
-            <a:pPr algn="l">
-              <a:lnSpc>
-                <a:spcPct val="112000"/>
-              </a:lnSpc>
-              <a:spcAft>
-                <a:spcPts val="1000"/>
-              </a:spcAft>
-            </a:pPr>
-            <a:r>
-              <a:rPr sz="1700" b="1" i="0">
-                <a:solidFill>
-                  <a:srgbClr val="0C8792"/>
-                </a:solidFill>
-                <a:latin typeface="Calibri"/>
-              </a:rPr>
-              <a:t>▪  </a:t>
-            </a:r>
-            <a:r>
-              <a:rPr sz="1700" b="1" i="0">
-                <a:solidFill>
-                  <a:srgbClr val="142128"/>
-                </a:solidFill>
-                <a:latin typeface="Calibri"/>
-              </a:rPr>
-              <a:t>Trois fichiers croisés</a:t>
-            </a:r>
-            <a:r>
-              <a:rPr sz="1700" b="0" i="0">
-                <a:solidFill>
-                  <a:srgbClr val="142128"/>
-                </a:solidFill>
-                <a:latin typeface="Calibri"/>
-              </a:rPr>
-              <a:t> — les vols (592 Mo), l'annuaire des 14 compagnies, les 322 aéroports avec leurs coordonnées (pour la carte)</a:t>
-            </a:r>
-          </a:p>
-        </p:txBody>
-      </p:sp>
-      <p:sp>
-        <p:nvSpPr>
-          <p:cNvPr id="7" name="Rounded Rectangle 6"/>
-          <p:cNvSpPr/>
-          <p:nvPr/>
-        </p:nvSpPr>
-        <p:spPr>
-          <a:xfrm>
-            <a:off x="502920" y="4160520"/>
-            <a:ext cx="2615184" cy="1417320"/>
-          </a:xfrm>
-          <a:prstGeom prst="roundRect">
-            <a:avLst>
-              <a:gd name="adj" fmla="val 8000"/>
-            </a:avLst>
-          </a:prstGeom>
-          <a:solidFill>
-            <a:srgbClr val="FFFFFF"/>
-          </a:solidFill>
-          <a:ln w="12700">
-            <a:solidFill>
-              <a:srgbClr val="DCE5E8"/>
-            </a:solidFill>
-          </a:ln>
-          <a:effectLst/>
-        </p:spPr>
-        <p:style>
-          <a:lnRef idx="1">
-            <a:schemeClr val="accent1"/>
-          </a:lnRef>
-          <a:fillRef idx="3">
-            <a:schemeClr val="accent1"/>
-          </a:fillRef>
-          <a:effectRef idx="2">
-            <a:schemeClr val="accent1"/>
-          </a:effectRef>
-          <a:fontRef idx="minor">
-            <a:schemeClr val="lt1"/>
-          </a:fontRef>
-        </p:style>
-        <p:txBody>
-          <a:bodyPr rtlCol="0" anchor="ctr"/>
-          <a:lstStyle/>
-          <a:p>
-            <a:pPr algn="ctr"/>
-            <a:endParaRPr/>
-          </a:p>
-        </p:txBody>
-      </p:sp>
-      <p:sp>
-        <p:nvSpPr>
-          <p:cNvPr id="8" name="Rectangle 7"/>
-          <p:cNvSpPr/>
-          <p:nvPr/>
-        </p:nvSpPr>
-        <p:spPr>
-          <a:xfrm>
-            <a:off x="502920" y="4270248"/>
-            <a:ext cx="50292" cy="1197864"/>
-          </a:xfrm>
-          <a:prstGeom prst="rect">
-            <a:avLst/>
-          </a:prstGeom>
-          <a:solidFill>
-            <a:srgbClr val="0C8792"/>
-          </a:solidFill>
-          <a:ln>
-            <a:noFill/>
-          </a:ln>
-          <a:effectLst/>
-        </p:spPr>
-        <p:style>
-          <a:lnRef idx="1">
-            <a:schemeClr val="accent1"/>
-          </a:lnRef>
-          <a:fillRef idx="3">
-            <a:schemeClr val="accent1"/>
-          </a:fillRef>
-          <a:effectRef idx="2">
-            <a:schemeClr val="accent1"/>
-          </a:effectRef>
-          <a:fontRef idx="minor">
-            <a:schemeClr val="lt1"/>
-          </a:fontRef>
-        </p:style>
-        <p:txBody>
-          <a:bodyPr rtlCol="0" anchor="ctr"/>
-          <a:lstStyle/>
-          <a:p>
-            <a:pPr algn="ctr"/>
-            <a:endParaRPr/>
-          </a:p>
-        </p:txBody>
-      </p:sp>
-      <p:sp>
-        <p:nvSpPr>
-          <p:cNvPr id="9" name="TextBox 8"/>
-          <p:cNvSpPr txBox="1"/>
-          <p:nvPr/>
-        </p:nvSpPr>
-        <p:spPr>
-          <a:xfrm>
-            <a:off x="704088" y="4288536"/>
-            <a:ext cx="2249424" cy="320040"/>
+            <a:off x="502920" y="6455664"/>
+            <a:ext cx="8229600" cy="320040"/>
           </a:xfrm>
           <a:prstGeom prst="rect">
             <a:avLst/>
@@ -3927,756 +3660,6 @@
               </a:spcAft>
             </a:pPr>
             <a:r>
-              <a:rPr sz="1100" b="1" i="0">
-                <a:solidFill>
-                  <a:srgbClr val="687985"/>
-                </a:solidFill>
-                <a:latin typeface="Calibri"/>
-              </a:rPr>
-              <a:t>VOLS ANALYSÉS</a:t>
-            </a:r>
-          </a:p>
-        </p:txBody>
-      </p:sp>
-      <p:sp>
-        <p:nvSpPr>
-          <p:cNvPr id="10" name="TextBox 9"/>
-          <p:cNvSpPr txBox="1"/>
-          <p:nvPr/>
-        </p:nvSpPr>
-        <p:spPr>
-          <a:xfrm>
-            <a:off x="704088" y="4562856"/>
-            <a:ext cx="2249424" cy="502920"/>
-          </a:xfrm>
-          <a:prstGeom prst="rect">
-            <a:avLst/>
-          </a:prstGeom>
-          <a:noFill/>
-        </p:spPr>
-        <p:txBody>
-          <a:bodyPr wrap="square" anchor="t">
-            <a:spAutoFit/>
-          </a:bodyPr>
-          <a:lstStyle/>
-          <a:p>
-            <a:pPr algn="l">
-              <a:spcAft>
-                <a:spcPts val="600"/>
-              </a:spcAft>
-            </a:pPr>
-            <a:r>
-              <a:rPr sz="2700" b="1" i="0">
-                <a:solidFill>
-                  <a:srgbClr val="142128"/>
-                </a:solidFill>
-                <a:latin typeface="Calibri"/>
-              </a:rPr>
-              <a:t>5 819 079</a:t>
-            </a:r>
-          </a:p>
-        </p:txBody>
-      </p:sp>
-      <p:sp>
-        <p:nvSpPr>
-          <p:cNvPr id="11" name="TextBox 10"/>
-          <p:cNvSpPr txBox="1"/>
-          <p:nvPr/>
-        </p:nvSpPr>
-        <p:spPr>
-          <a:xfrm>
-            <a:off x="704088" y="5193792"/>
-            <a:ext cx="2249424" cy="320040"/>
-          </a:xfrm>
-          <a:prstGeom prst="rect">
-            <a:avLst/>
-          </a:prstGeom>
-          <a:noFill/>
-        </p:spPr>
-        <p:txBody>
-          <a:bodyPr wrap="square" anchor="t">
-            <a:spAutoFit/>
-          </a:bodyPr>
-          <a:lstStyle/>
-          <a:p>
-            <a:pPr algn="l">
-              <a:spcAft>
-                <a:spcPts val="600"/>
-              </a:spcAft>
-            </a:pPr>
-            <a:r>
-              <a:rPr sz="1100" b="0" i="0">
-                <a:solidFill>
-                  <a:srgbClr val="687985"/>
-                </a:solidFill>
-                <a:latin typeface="Calibri"/>
-              </a:rPr>
-              <a:t>année 2015 complète</a:t>
-            </a:r>
-          </a:p>
-        </p:txBody>
-      </p:sp>
-      <p:sp>
-        <p:nvSpPr>
-          <p:cNvPr id="12" name="Rounded Rectangle 11"/>
-          <p:cNvSpPr/>
-          <p:nvPr/>
-        </p:nvSpPr>
-        <p:spPr>
-          <a:xfrm>
-            <a:off x="3346704" y="4160520"/>
-            <a:ext cx="2615184" cy="1417320"/>
-          </a:xfrm>
-          <a:prstGeom prst="roundRect">
-            <a:avLst>
-              <a:gd name="adj" fmla="val 8000"/>
-            </a:avLst>
-          </a:prstGeom>
-          <a:solidFill>
-            <a:srgbClr val="FFFFFF"/>
-          </a:solidFill>
-          <a:ln w="12700">
-            <a:solidFill>
-              <a:srgbClr val="DCE5E8"/>
-            </a:solidFill>
-          </a:ln>
-          <a:effectLst/>
-        </p:spPr>
-        <p:style>
-          <a:lnRef idx="1">
-            <a:schemeClr val="accent1"/>
-          </a:lnRef>
-          <a:fillRef idx="3">
-            <a:schemeClr val="accent1"/>
-          </a:fillRef>
-          <a:effectRef idx="2">
-            <a:schemeClr val="accent1"/>
-          </a:effectRef>
-          <a:fontRef idx="minor">
-            <a:schemeClr val="lt1"/>
-          </a:fontRef>
-        </p:style>
-        <p:txBody>
-          <a:bodyPr rtlCol="0" anchor="ctr"/>
-          <a:lstStyle/>
-          <a:p>
-            <a:pPr algn="ctr"/>
-            <a:endParaRPr/>
-          </a:p>
-        </p:txBody>
-      </p:sp>
-      <p:sp>
-        <p:nvSpPr>
-          <p:cNvPr id="13" name="Rectangle 12"/>
-          <p:cNvSpPr/>
-          <p:nvPr/>
-        </p:nvSpPr>
-        <p:spPr>
-          <a:xfrm>
-            <a:off x="3346704" y="4270248"/>
-            <a:ext cx="50292" cy="1197864"/>
-          </a:xfrm>
-          <a:prstGeom prst="rect">
-            <a:avLst/>
-          </a:prstGeom>
-          <a:solidFill>
-            <a:srgbClr val="0C8792"/>
-          </a:solidFill>
-          <a:ln>
-            <a:noFill/>
-          </a:ln>
-          <a:effectLst/>
-        </p:spPr>
-        <p:style>
-          <a:lnRef idx="1">
-            <a:schemeClr val="accent1"/>
-          </a:lnRef>
-          <a:fillRef idx="3">
-            <a:schemeClr val="accent1"/>
-          </a:fillRef>
-          <a:effectRef idx="2">
-            <a:schemeClr val="accent1"/>
-          </a:effectRef>
-          <a:fontRef idx="minor">
-            <a:schemeClr val="lt1"/>
-          </a:fontRef>
-        </p:style>
-        <p:txBody>
-          <a:bodyPr rtlCol="0" anchor="ctr"/>
-          <a:lstStyle/>
-          <a:p>
-            <a:pPr algn="ctr"/>
-            <a:endParaRPr/>
-          </a:p>
-        </p:txBody>
-      </p:sp>
-      <p:sp>
-        <p:nvSpPr>
-          <p:cNvPr id="14" name="TextBox 13"/>
-          <p:cNvSpPr txBox="1"/>
-          <p:nvPr/>
-        </p:nvSpPr>
-        <p:spPr>
-          <a:xfrm>
-            <a:off x="3547872" y="4288536"/>
-            <a:ext cx="2249424" cy="320040"/>
-          </a:xfrm>
-          <a:prstGeom prst="rect">
-            <a:avLst/>
-          </a:prstGeom>
-          <a:noFill/>
-        </p:spPr>
-        <p:txBody>
-          <a:bodyPr wrap="square" anchor="t">
-            <a:spAutoFit/>
-          </a:bodyPr>
-          <a:lstStyle/>
-          <a:p>
-            <a:pPr algn="l">
-              <a:spcAft>
-                <a:spcPts val="600"/>
-              </a:spcAft>
-            </a:pPr>
-            <a:r>
-              <a:rPr sz="1100" b="1" i="0">
-                <a:solidFill>
-                  <a:srgbClr val="687985"/>
-                </a:solidFill>
-                <a:latin typeface="Calibri"/>
-              </a:rPr>
-              <a:t>COMPAGNIES</a:t>
-            </a:r>
-          </a:p>
-        </p:txBody>
-      </p:sp>
-      <p:sp>
-        <p:nvSpPr>
-          <p:cNvPr id="15" name="TextBox 14"/>
-          <p:cNvSpPr txBox="1"/>
-          <p:nvPr/>
-        </p:nvSpPr>
-        <p:spPr>
-          <a:xfrm>
-            <a:off x="3547872" y="4562856"/>
-            <a:ext cx="2249424" cy="502920"/>
-          </a:xfrm>
-          <a:prstGeom prst="rect">
-            <a:avLst/>
-          </a:prstGeom>
-          <a:noFill/>
-        </p:spPr>
-        <p:txBody>
-          <a:bodyPr wrap="square" anchor="t">
-            <a:spAutoFit/>
-          </a:bodyPr>
-          <a:lstStyle/>
-          <a:p>
-            <a:pPr algn="l">
-              <a:spcAft>
-                <a:spcPts val="600"/>
-              </a:spcAft>
-            </a:pPr>
-            <a:r>
-              <a:rPr sz="2700" b="1" i="0">
-                <a:solidFill>
-                  <a:srgbClr val="142128"/>
-                </a:solidFill>
-                <a:latin typeface="Calibri"/>
-              </a:rPr>
-              <a:t>14</a:t>
-            </a:r>
-          </a:p>
-        </p:txBody>
-      </p:sp>
-      <p:sp>
-        <p:nvSpPr>
-          <p:cNvPr id="16" name="TextBox 15"/>
-          <p:cNvSpPr txBox="1"/>
-          <p:nvPr/>
-        </p:nvSpPr>
-        <p:spPr>
-          <a:xfrm>
-            <a:off x="3547872" y="5193792"/>
-            <a:ext cx="2249424" cy="320040"/>
-          </a:xfrm>
-          <a:prstGeom prst="rect">
-            <a:avLst/>
-          </a:prstGeom>
-          <a:noFill/>
-        </p:spPr>
-        <p:txBody>
-          <a:bodyPr wrap="square" anchor="t">
-            <a:spAutoFit/>
-          </a:bodyPr>
-          <a:lstStyle/>
-          <a:p>
-            <a:pPr algn="l">
-              <a:spcAft>
-                <a:spcPts val="600"/>
-              </a:spcAft>
-            </a:pPr>
-            <a:r>
-              <a:rPr sz="1100" b="0" i="0">
-                <a:solidFill>
-                  <a:srgbClr val="687985"/>
-                </a:solidFill>
-                <a:latin typeface="Calibri"/>
-              </a:rPr>
-              <a:t>de Delta à Spirit</a:t>
-            </a:r>
-          </a:p>
-        </p:txBody>
-      </p:sp>
-      <p:sp>
-        <p:nvSpPr>
-          <p:cNvPr id="17" name="Rounded Rectangle 16"/>
-          <p:cNvSpPr/>
-          <p:nvPr/>
-        </p:nvSpPr>
-        <p:spPr>
-          <a:xfrm>
-            <a:off x="6190488" y="4160520"/>
-            <a:ext cx="2615184" cy="1417320"/>
-          </a:xfrm>
-          <a:prstGeom prst="roundRect">
-            <a:avLst>
-              <a:gd name="adj" fmla="val 8000"/>
-            </a:avLst>
-          </a:prstGeom>
-          <a:solidFill>
-            <a:srgbClr val="FFFFFF"/>
-          </a:solidFill>
-          <a:ln w="12700">
-            <a:solidFill>
-              <a:srgbClr val="DCE5E8"/>
-            </a:solidFill>
-          </a:ln>
-          <a:effectLst/>
-        </p:spPr>
-        <p:style>
-          <a:lnRef idx="1">
-            <a:schemeClr val="accent1"/>
-          </a:lnRef>
-          <a:fillRef idx="3">
-            <a:schemeClr val="accent1"/>
-          </a:fillRef>
-          <a:effectRef idx="2">
-            <a:schemeClr val="accent1"/>
-          </a:effectRef>
-          <a:fontRef idx="minor">
-            <a:schemeClr val="lt1"/>
-          </a:fontRef>
-        </p:style>
-        <p:txBody>
-          <a:bodyPr rtlCol="0" anchor="ctr"/>
-          <a:lstStyle/>
-          <a:p>
-            <a:pPr algn="ctr"/>
-            <a:endParaRPr/>
-          </a:p>
-        </p:txBody>
-      </p:sp>
-      <p:sp>
-        <p:nvSpPr>
-          <p:cNvPr id="18" name="Rectangle 17"/>
-          <p:cNvSpPr/>
-          <p:nvPr/>
-        </p:nvSpPr>
-        <p:spPr>
-          <a:xfrm>
-            <a:off x="6190488" y="4270248"/>
-            <a:ext cx="50292" cy="1197864"/>
-          </a:xfrm>
-          <a:prstGeom prst="rect">
-            <a:avLst/>
-          </a:prstGeom>
-          <a:solidFill>
-            <a:srgbClr val="0C8792"/>
-          </a:solidFill>
-          <a:ln>
-            <a:noFill/>
-          </a:ln>
-          <a:effectLst/>
-        </p:spPr>
-        <p:style>
-          <a:lnRef idx="1">
-            <a:schemeClr val="accent1"/>
-          </a:lnRef>
-          <a:fillRef idx="3">
-            <a:schemeClr val="accent1"/>
-          </a:fillRef>
-          <a:effectRef idx="2">
-            <a:schemeClr val="accent1"/>
-          </a:effectRef>
-          <a:fontRef idx="minor">
-            <a:schemeClr val="lt1"/>
-          </a:fontRef>
-        </p:style>
-        <p:txBody>
-          <a:bodyPr rtlCol="0" anchor="ctr"/>
-          <a:lstStyle/>
-          <a:p>
-            <a:pPr algn="ctr"/>
-            <a:endParaRPr/>
-          </a:p>
-        </p:txBody>
-      </p:sp>
-      <p:sp>
-        <p:nvSpPr>
-          <p:cNvPr id="19" name="TextBox 18"/>
-          <p:cNvSpPr txBox="1"/>
-          <p:nvPr/>
-        </p:nvSpPr>
-        <p:spPr>
-          <a:xfrm>
-            <a:off x="6391656" y="4288536"/>
-            <a:ext cx="2249424" cy="320040"/>
-          </a:xfrm>
-          <a:prstGeom prst="rect">
-            <a:avLst/>
-          </a:prstGeom>
-          <a:noFill/>
-        </p:spPr>
-        <p:txBody>
-          <a:bodyPr wrap="square" anchor="t">
-            <a:spAutoFit/>
-          </a:bodyPr>
-          <a:lstStyle/>
-          <a:p>
-            <a:pPr algn="l">
-              <a:spcAft>
-                <a:spcPts val="600"/>
-              </a:spcAft>
-            </a:pPr>
-            <a:r>
-              <a:rPr sz="1100" b="1" i="0">
-                <a:solidFill>
-                  <a:srgbClr val="687985"/>
-                </a:solidFill>
-                <a:latin typeface="Calibri"/>
-              </a:rPr>
-              <a:t>AÉROPORTS</a:t>
-            </a:r>
-          </a:p>
-        </p:txBody>
-      </p:sp>
-      <p:sp>
-        <p:nvSpPr>
-          <p:cNvPr id="20" name="TextBox 19"/>
-          <p:cNvSpPr txBox="1"/>
-          <p:nvPr/>
-        </p:nvSpPr>
-        <p:spPr>
-          <a:xfrm>
-            <a:off x="6391656" y="4562856"/>
-            <a:ext cx="2249424" cy="502920"/>
-          </a:xfrm>
-          <a:prstGeom prst="rect">
-            <a:avLst/>
-          </a:prstGeom>
-          <a:noFill/>
-        </p:spPr>
-        <p:txBody>
-          <a:bodyPr wrap="square" anchor="t">
-            <a:spAutoFit/>
-          </a:bodyPr>
-          <a:lstStyle/>
-          <a:p>
-            <a:pPr algn="l">
-              <a:spcAft>
-                <a:spcPts val="600"/>
-              </a:spcAft>
-            </a:pPr>
-            <a:r>
-              <a:rPr sz="2700" b="1" i="0">
-                <a:solidFill>
-                  <a:srgbClr val="142128"/>
-                </a:solidFill>
-                <a:latin typeface="Calibri"/>
-              </a:rPr>
-              <a:t>322</a:t>
-            </a:r>
-          </a:p>
-        </p:txBody>
-      </p:sp>
-      <p:sp>
-        <p:nvSpPr>
-          <p:cNvPr id="21" name="TextBox 20"/>
-          <p:cNvSpPr txBox="1"/>
-          <p:nvPr/>
-        </p:nvSpPr>
-        <p:spPr>
-          <a:xfrm>
-            <a:off x="6391656" y="5193792"/>
-            <a:ext cx="2249424" cy="320040"/>
-          </a:xfrm>
-          <a:prstGeom prst="rect">
-            <a:avLst/>
-          </a:prstGeom>
-          <a:noFill/>
-        </p:spPr>
-        <p:txBody>
-          <a:bodyPr wrap="square" anchor="t">
-            <a:spAutoFit/>
-          </a:bodyPr>
-          <a:lstStyle/>
-          <a:p>
-            <a:pPr algn="l">
-              <a:spcAft>
-                <a:spcPts val="600"/>
-              </a:spcAft>
-            </a:pPr>
-            <a:r>
-              <a:rPr sz="1100" b="0" i="0">
-                <a:solidFill>
-                  <a:srgbClr val="687985"/>
-                </a:solidFill>
-                <a:latin typeface="Calibri"/>
-              </a:rPr>
-              <a:t>4 693 liaisons directes</a:t>
-            </a:r>
-          </a:p>
-        </p:txBody>
-      </p:sp>
-      <p:sp>
-        <p:nvSpPr>
-          <p:cNvPr id="22" name="Rounded Rectangle 21"/>
-          <p:cNvSpPr/>
-          <p:nvPr/>
-        </p:nvSpPr>
-        <p:spPr>
-          <a:xfrm>
-            <a:off x="9034272" y="4160520"/>
-            <a:ext cx="2615184" cy="1417320"/>
-          </a:xfrm>
-          <a:prstGeom prst="roundRect">
-            <a:avLst>
-              <a:gd name="adj" fmla="val 8000"/>
-            </a:avLst>
-          </a:prstGeom>
-          <a:solidFill>
-            <a:srgbClr val="FFFFFF"/>
-          </a:solidFill>
-          <a:ln w="12700">
-            <a:solidFill>
-              <a:srgbClr val="DCE5E8"/>
-            </a:solidFill>
-          </a:ln>
-          <a:effectLst/>
-        </p:spPr>
-        <p:style>
-          <a:lnRef idx="1">
-            <a:schemeClr val="accent1"/>
-          </a:lnRef>
-          <a:fillRef idx="3">
-            <a:schemeClr val="accent1"/>
-          </a:fillRef>
-          <a:effectRef idx="2">
-            <a:schemeClr val="accent1"/>
-          </a:effectRef>
-          <a:fontRef idx="minor">
-            <a:schemeClr val="lt1"/>
-          </a:fontRef>
-        </p:style>
-        <p:txBody>
-          <a:bodyPr rtlCol="0" anchor="ctr"/>
-          <a:lstStyle/>
-          <a:p>
-            <a:pPr algn="ctr"/>
-            <a:endParaRPr/>
-          </a:p>
-        </p:txBody>
-      </p:sp>
-      <p:sp>
-        <p:nvSpPr>
-          <p:cNvPr id="23" name="Rectangle 22"/>
-          <p:cNvSpPr/>
-          <p:nvPr/>
-        </p:nvSpPr>
-        <p:spPr>
-          <a:xfrm>
-            <a:off x="9034272" y="4270248"/>
-            <a:ext cx="50292" cy="1197864"/>
-          </a:xfrm>
-          <a:prstGeom prst="rect">
-            <a:avLst/>
-          </a:prstGeom>
-          <a:solidFill>
-            <a:srgbClr val="EB5A3C"/>
-          </a:solidFill>
-          <a:ln>
-            <a:noFill/>
-          </a:ln>
-          <a:effectLst/>
-        </p:spPr>
-        <p:style>
-          <a:lnRef idx="1">
-            <a:schemeClr val="accent1"/>
-          </a:lnRef>
-          <a:fillRef idx="3">
-            <a:schemeClr val="accent1"/>
-          </a:fillRef>
-          <a:effectRef idx="2">
-            <a:schemeClr val="accent1"/>
-          </a:effectRef>
-          <a:fontRef idx="minor">
-            <a:schemeClr val="lt1"/>
-          </a:fontRef>
-        </p:style>
-        <p:txBody>
-          <a:bodyPr rtlCol="0" anchor="ctr"/>
-          <a:lstStyle/>
-          <a:p>
-            <a:pPr algn="ctr"/>
-            <a:endParaRPr/>
-          </a:p>
-        </p:txBody>
-      </p:sp>
-      <p:sp>
-        <p:nvSpPr>
-          <p:cNvPr id="24" name="TextBox 23"/>
-          <p:cNvSpPr txBox="1"/>
-          <p:nvPr/>
-        </p:nvSpPr>
-        <p:spPr>
-          <a:xfrm>
-            <a:off x="9235440" y="4288536"/>
-            <a:ext cx="2249424" cy="320040"/>
-          </a:xfrm>
-          <a:prstGeom prst="rect">
-            <a:avLst/>
-          </a:prstGeom>
-          <a:noFill/>
-        </p:spPr>
-        <p:txBody>
-          <a:bodyPr wrap="square" anchor="t">
-            <a:spAutoFit/>
-          </a:bodyPr>
-          <a:lstStyle/>
-          <a:p>
-            <a:pPr algn="l">
-              <a:spcAft>
-                <a:spcPts val="600"/>
-              </a:spcAft>
-            </a:pPr>
-            <a:r>
-              <a:rPr sz="1100" b="1" i="0">
-                <a:solidFill>
-                  <a:srgbClr val="687985"/>
-                </a:solidFill>
-                <a:latin typeface="Calibri"/>
-              </a:rPr>
-              <a:t>VOLS EN RETARD</a:t>
-            </a:r>
-          </a:p>
-        </p:txBody>
-      </p:sp>
-      <p:sp>
-        <p:nvSpPr>
-          <p:cNvPr id="25" name="TextBox 24"/>
-          <p:cNvSpPr txBox="1"/>
-          <p:nvPr/>
-        </p:nvSpPr>
-        <p:spPr>
-          <a:xfrm>
-            <a:off x="9235440" y="4562856"/>
-            <a:ext cx="2249424" cy="502920"/>
-          </a:xfrm>
-          <a:prstGeom prst="rect">
-            <a:avLst/>
-          </a:prstGeom>
-          <a:noFill/>
-        </p:spPr>
-        <p:txBody>
-          <a:bodyPr wrap="square" anchor="t">
-            <a:spAutoFit/>
-          </a:bodyPr>
-          <a:lstStyle/>
-          <a:p>
-            <a:pPr algn="l">
-              <a:spcAft>
-                <a:spcPts val="600"/>
-              </a:spcAft>
-            </a:pPr>
-            <a:r>
-              <a:rPr sz="2700" b="1" i="0">
-                <a:solidFill>
-                  <a:srgbClr val="142128"/>
-                </a:solidFill>
-                <a:latin typeface="Calibri"/>
-              </a:rPr>
-              <a:t>18,6 %</a:t>
-            </a:r>
-          </a:p>
-        </p:txBody>
-      </p:sp>
-      <p:sp>
-        <p:nvSpPr>
-          <p:cNvPr id="26" name="TextBox 25"/>
-          <p:cNvSpPr txBox="1"/>
-          <p:nvPr/>
-        </p:nvSpPr>
-        <p:spPr>
-          <a:xfrm>
-            <a:off x="9235440" y="5193792"/>
-            <a:ext cx="2249424" cy="320040"/>
-          </a:xfrm>
-          <a:prstGeom prst="rect">
-            <a:avLst/>
-          </a:prstGeom>
-          <a:noFill/>
-        </p:spPr>
-        <p:txBody>
-          <a:bodyPr wrap="square" anchor="t">
-            <a:spAutoFit/>
-          </a:bodyPr>
-          <a:lstStyle/>
-          <a:p>
-            <a:pPr algn="l">
-              <a:spcAft>
-                <a:spcPts val="600"/>
-              </a:spcAft>
-            </a:pPr>
-            <a:r>
-              <a:rPr sz="1100" b="0" i="0">
-                <a:solidFill>
-                  <a:srgbClr val="687985"/>
-                </a:solidFill>
-                <a:latin typeface="Calibri"/>
-              </a:rPr>
-              <a:t>1,5 % de vols annulés</a:t>
-            </a:r>
-          </a:p>
-        </p:txBody>
-      </p:sp>
-      <p:sp>
-        <p:nvSpPr>
-          <p:cNvPr id="27" name="TextBox 26"/>
-          <p:cNvSpPr txBox="1"/>
-          <p:nvPr/>
-        </p:nvSpPr>
-        <p:spPr>
-          <a:xfrm>
-            <a:off x="502920" y="6455664"/>
-            <a:ext cx="8229600" cy="320040"/>
-          </a:xfrm>
-          <a:prstGeom prst="rect">
-            <a:avLst/>
-          </a:prstGeom>
-          <a:noFill/>
-        </p:spPr>
-        <p:txBody>
-          <a:bodyPr wrap="square" anchor="t">
-            <a:spAutoFit/>
-          </a:bodyPr>
-          <a:lstStyle/>
-          <a:p>
-            <a:pPr algn="l">
-              <a:spcAft>
-                <a:spcPts val="600"/>
-              </a:spcAft>
-            </a:pPr>
-            <a:r>
               <a:rPr sz="1000" b="0" i="0">
                 <a:solidFill>
                   <a:srgbClr val="687985"/>
@@ -4723,6 +3706,1463 @@
                 <a:latin typeface="Calibri"/>
               </a:rPr>
               <a:t>2</a:t>
+            </a:r>
+          </a:p>
+        </p:txBody>
+      </p:sp>
+      <p:sp>
+        <p:nvSpPr>
+          <p:cNvPr id="29" name="TextBox 28"/>
+          <p:cNvSpPr txBox="1"/>
+          <p:nvPr/>
+        </p:nvSpPr>
+        <p:spPr>
+          <a:xfrm>
+            <a:off x="502920" y="1207008"/>
+            <a:ext cx="11155680" cy="1170432"/>
+          </a:xfrm>
+          <a:prstGeom prst="rect">
+            <a:avLst/>
+          </a:prstGeom>
+          <a:noFill/>
+        </p:spPr>
+        <p:txBody>
+          <a:bodyPr wrap="square" anchor="t">
+            <a:spAutoFit/>
+          </a:bodyPr>
+          <a:lstStyle/>
+          <a:p>
+            <a:pPr algn="l">
+              <a:spcAft>
+                <a:spcPts val="300"/>
+              </a:spcAft>
+            </a:pPr>
+            <a:r>
+              <a:rPr sz="1350" b="1">
+                <a:solidFill>
+                  <a:srgbClr val="0C8792"/>
+                </a:solidFill>
+                <a:latin typeface="Calibri"/>
+              </a:rPr>
+              <a:t>▪  </a:t>
+            </a:r>
+            <a:r>
+              <a:rPr sz="1350" b="1">
+                <a:solidFill>
+                  <a:srgbClr val="142128"/>
+                </a:solidFill>
+                <a:latin typeface="Calibri"/>
+              </a:rPr>
+              <a:t>Recense tous les vols intérieurs américains de l'année 2015</a:t>
+            </a:r>
+            <a:r>
+              <a:rPr sz="1350" b="0">
+                <a:solidFill>
+                  <a:srgbClr val="142128"/>
+                </a:solidFill>
+                <a:latin typeface="Calibri"/>
+              </a:rPr>
+              <a:t> — 5 819 079 enregistrements, 31 colonnes</a:t>
+            </a:r>
+          </a:p>
+          <a:p>
+            <a:pPr algn="l">
+              <a:spcAft>
+                <a:spcPts val="300"/>
+              </a:spcAft>
+            </a:pPr>
+            <a:r>
+              <a:rPr sz="1350" b="1">
+                <a:solidFill>
+                  <a:srgbClr val="0C8792"/>
+                </a:solidFill>
+                <a:latin typeface="Calibri"/>
+              </a:rPr>
+              <a:t>▪  </a:t>
+            </a:r>
+            <a:r>
+              <a:rPr sz="1350" b="1">
+                <a:solidFill>
+                  <a:srgbClr val="142128"/>
+                </a:solidFill>
+                <a:latin typeface="Calibri"/>
+              </a:rPr>
+              <a:t>Trois fichiers croisés</a:t>
+            </a:r>
+            <a:r>
+              <a:rPr sz="1350" b="0">
+                <a:solidFill>
+                  <a:srgbClr val="142128"/>
+                </a:solidFill>
+                <a:latin typeface="Calibri"/>
+              </a:rPr>
+              <a:t> : les vols, l'annuaire des 14 compagnies, les 322 aéroports avec coordonnées</a:t>
+            </a:r>
+          </a:p>
+          <a:p>
+            <a:pPr algn="l">
+              <a:spcAft>
+                <a:spcPts val="300"/>
+              </a:spcAft>
+            </a:pPr>
+            <a:r>
+              <a:rPr sz="1350" b="1">
+                <a:solidFill>
+                  <a:srgbClr val="0C8792"/>
+                </a:solidFill>
+                <a:latin typeface="Calibri"/>
+              </a:rPr>
+              <a:t>▪  </a:t>
+            </a:r>
+            <a:r>
+              <a:rPr sz="1350" b="1">
+                <a:solidFill>
+                  <a:srgbClr val="142128"/>
+                </a:solidFill>
+                <a:latin typeface="Calibri"/>
+              </a:rPr>
+              <a:t>Une ligne = un vol programmé</a:t>
+            </a:r>
+            <a:r>
+              <a:rPr sz="1350" b="0">
+                <a:solidFill>
+                  <a:srgbClr val="142128"/>
+                </a:solidFill>
+                <a:latin typeface="Calibri"/>
+              </a:rPr>
+              <a:t> : date, compagnie, aéroports, horaires, retard, annulation et motif</a:t>
+            </a:r>
+          </a:p>
+          <a:p>
+            <a:pPr algn="l">
+              <a:spcAft>
+                <a:spcPts val="300"/>
+              </a:spcAft>
+            </a:pPr>
+            <a:r>
+              <a:rPr sz="1350" b="1">
+                <a:solidFill>
+                  <a:srgbClr val="0C8792"/>
+                </a:solidFill>
+                <a:latin typeface="Calibri"/>
+              </a:rPr>
+              <a:t>▪  </a:t>
+            </a:r>
+            <a:r>
+              <a:rPr sz="1350" b="1">
+                <a:solidFill>
+                  <a:srgbClr val="142128"/>
+                </a:solidFill>
+                <a:latin typeface="Calibri"/>
+              </a:rPr>
+              <a:t>Source</a:t>
+            </a:r>
+            <a:r>
+              <a:rPr sz="1350" b="0">
+                <a:solidFill>
+                  <a:srgbClr val="142128"/>
+                </a:solidFill>
+                <a:latin typeface="Calibri"/>
+              </a:rPr>
+              <a:t> : Kaggle / U.S. DOT — kaggle.com/datasets/usdot/flight-delays</a:t>
+            </a:r>
+          </a:p>
+        </p:txBody>
+      </p:sp>
+      <p:sp>
+        <p:nvSpPr>
+          <p:cNvPr id="30" name="TextBox 29"/>
+          <p:cNvSpPr txBox="1"/>
+          <p:nvPr/>
+        </p:nvSpPr>
+        <p:spPr>
+          <a:xfrm>
+            <a:off x="502920" y="2432304"/>
+            <a:ext cx="11155680" cy="274320"/>
+          </a:xfrm>
+          <a:prstGeom prst="rect">
+            <a:avLst/>
+          </a:prstGeom>
+          <a:noFill/>
+        </p:spPr>
+        <p:txBody>
+          <a:bodyPr wrap="square" anchor="t">
+            <a:spAutoFit/>
+          </a:bodyPr>
+          <a:lstStyle/>
+          <a:p>
+            <a:pPr algn="l">
+              <a:spcAft>
+                <a:spcPts val="400"/>
+              </a:spcAft>
+            </a:pPr>
+            <a:r>
+              <a:rPr sz="1200" b="1">
+                <a:solidFill>
+                  <a:srgbClr val="687985"/>
+                </a:solidFill>
+                <a:latin typeface="Calibri"/>
+              </a:rPr>
+              <a:t>Extrait du fichier des vols (données réelles) :</a:t>
+            </a:r>
+          </a:p>
+        </p:txBody>
+      </p:sp>
+      <p:graphicFrame>
+        <p:nvGraphicFramePr>
+          <p:cNvPr id="31" name="Table 30"/>
+          <p:cNvGraphicFramePr>
+            <a:graphicFrameLocks noGrp="1"/>
+          </p:cNvGraphicFramePr>
+          <p:nvPr/>
+        </p:nvGraphicFramePr>
+        <p:xfrm>
+          <a:off x="502920" y="2724912"/>
+          <a:ext cx="11155680" cy="1508760"/>
+        </p:xfrm>
+        <a:graphic>
+          <a:graphicData uri="http://schemas.openxmlformats.org/drawingml/2006/table">
+            <a:tbl>
+              <a:tblPr firstRow="1" bandRow="1">
+                <a:tableStyleId>{5C22544A-7EE6-4342-B048-85BDC9FD1C3A}</a:tableStyleId>
+              </a:tblPr>
+              <a:tblGrid>
+                <a:gridCol w="1234440"/>
+                <a:gridCol w="1051560"/>
+                <a:gridCol w="1508760"/>
+                <a:gridCol w="1783080"/>
+                <a:gridCol w="1143000"/>
+                <a:gridCol w="1508760"/>
+                <a:gridCol w="1234440"/>
+                <a:gridCol w="1691640"/>
+              </a:tblGrid>
+              <a:tr h="301752">
+                <a:tc>
+                  <a:txBody>
+                    <a:bodyPr/>
+                    <a:lstStyle/>
+                    <a:p>
+                      <a:r>
+                        <a:rPr sz="950" b="1">
+                          <a:solidFill>
+                            <a:srgbClr val="FFFFFF"/>
+                          </a:solidFill>
+                          <a:latin typeface="Calibri"/>
+                        </a:rPr>
+                        <a:t>DATE</a:t>
+                      </a:r>
+                    </a:p>
+                  </a:txBody>
+                  <a:tcPr>
+                    <a:solidFill>
+                      <a:srgbClr val="075D66"/>
+                    </a:solidFill>
+                  </a:tcPr>
+                </a:tc>
+                <a:tc>
+                  <a:txBody>
+                    <a:bodyPr/>
+                    <a:lstStyle/>
+                    <a:p>
+                      <a:r>
+                        <a:rPr sz="950" b="1">
+                          <a:solidFill>
+                            <a:srgbClr val="FFFFFF"/>
+                          </a:solidFill>
+                          <a:latin typeface="Calibri"/>
+                        </a:rPr>
+                        <a:t>AIRLINE</a:t>
+                      </a:r>
+                    </a:p>
+                  </a:txBody>
+                  <a:tcPr>
+                    <a:solidFill>
+                      <a:srgbClr val="075D66"/>
+                    </a:solidFill>
+                  </a:tcPr>
+                </a:tc>
+                <a:tc>
+                  <a:txBody>
+                    <a:bodyPr/>
+                    <a:lstStyle/>
+                    <a:p>
+                      <a:r>
+                        <a:rPr sz="950" b="1">
+                          <a:solidFill>
+                            <a:srgbClr val="FFFFFF"/>
+                          </a:solidFill>
+                          <a:latin typeface="Calibri"/>
+                        </a:rPr>
+                        <a:t>ORIGIN_AIRPORT</a:t>
+                      </a:r>
+                    </a:p>
+                  </a:txBody>
+                  <a:tcPr>
+                    <a:solidFill>
+                      <a:srgbClr val="075D66"/>
+                    </a:solidFill>
+                  </a:tcPr>
+                </a:tc>
+                <a:tc>
+                  <a:txBody>
+                    <a:bodyPr/>
+                    <a:lstStyle/>
+                    <a:p>
+                      <a:r>
+                        <a:rPr sz="950" b="1">
+                          <a:solidFill>
+                            <a:srgbClr val="FFFFFF"/>
+                          </a:solidFill>
+                          <a:latin typeface="Calibri"/>
+                        </a:rPr>
+                        <a:t>DESTINATION_AIRPORT</a:t>
+                      </a:r>
+                    </a:p>
+                  </a:txBody>
+                  <a:tcPr>
+                    <a:solidFill>
+                      <a:srgbClr val="075D66"/>
+                    </a:solidFill>
+                  </a:tcPr>
+                </a:tc>
+                <a:tc>
+                  <a:txBody>
+                    <a:bodyPr/>
+                    <a:lstStyle/>
+                    <a:p>
+                      <a:r>
+                        <a:rPr sz="950" b="1">
+                          <a:solidFill>
+                            <a:srgbClr val="FFFFFF"/>
+                          </a:solidFill>
+                          <a:latin typeface="Calibri"/>
+                        </a:rPr>
+                        <a:t>DISTANCE</a:t>
+                      </a:r>
+                    </a:p>
+                  </a:txBody>
+                  <a:tcPr>
+                    <a:solidFill>
+                      <a:srgbClr val="075D66"/>
+                    </a:solidFill>
+                  </a:tcPr>
+                </a:tc>
+                <a:tc>
+                  <a:txBody>
+                    <a:bodyPr/>
+                    <a:lstStyle/>
+                    <a:p>
+                      <a:r>
+                        <a:rPr sz="950" b="1">
+                          <a:solidFill>
+                            <a:srgbClr val="FFFFFF"/>
+                          </a:solidFill>
+                          <a:latin typeface="Calibri"/>
+                        </a:rPr>
+                        <a:t>ARRIVAL_DELAY</a:t>
+                      </a:r>
+                    </a:p>
+                  </a:txBody>
+                  <a:tcPr>
+                    <a:solidFill>
+                      <a:srgbClr val="075D66"/>
+                    </a:solidFill>
+                  </a:tcPr>
+                </a:tc>
+                <a:tc>
+                  <a:txBody>
+                    <a:bodyPr/>
+                    <a:lstStyle/>
+                    <a:p>
+                      <a:r>
+                        <a:rPr sz="950" b="1">
+                          <a:solidFill>
+                            <a:srgbClr val="FFFFFF"/>
+                          </a:solidFill>
+                          <a:latin typeface="Calibri"/>
+                        </a:rPr>
+                        <a:t>CANCELLED</a:t>
+                      </a:r>
+                    </a:p>
+                  </a:txBody>
+                  <a:tcPr>
+                    <a:solidFill>
+                      <a:srgbClr val="075D66"/>
+                    </a:solidFill>
+                  </a:tcPr>
+                </a:tc>
+                <a:tc>
+                  <a:txBody>
+                    <a:bodyPr/>
+                    <a:lstStyle/>
+                    <a:p>
+                      <a:r>
+                        <a:rPr sz="950" b="1">
+                          <a:solidFill>
+                            <a:srgbClr val="FFFFFF"/>
+                          </a:solidFill>
+                          <a:latin typeface="Calibri"/>
+                        </a:rPr>
+                        <a:t>CANCELLATION_REASON</a:t>
+                      </a:r>
+                    </a:p>
+                  </a:txBody>
+                  <a:tcPr>
+                    <a:solidFill>
+                      <a:srgbClr val="075D66"/>
+                    </a:solidFill>
+                  </a:tcPr>
+                </a:tc>
+              </a:tr>
+              <a:tr h="301752">
+                <a:tc>
+                  <a:txBody>
+                    <a:bodyPr/>
+                    <a:lstStyle/>
+                    <a:p>
+                      <a:r>
+                        <a:rPr sz="1050">
+                          <a:solidFill>
+                            <a:srgbClr val="142128"/>
+                          </a:solidFill>
+                          <a:latin typeface="Calibri"/>
+                        </a:rPr>
+                        <a:t>01/04/2015</a:t>
+                      </a:r>
+                    </a:p>
+                  </a:txBody>
+                  <a:tcPr>
+                    <a:solidFill>
+                      <a:srgbClr val="FFFFFF"/>
+                    </a:solidFill>
+                  </a:tcPr>
+                </a:tc>
+                <a:tc>
+                  <a:txBody>
+                    <a:bodyPr/>
+                    <a:lstStyle/>
+                    <a:p>
+                      <a:r>
+                        <a:rPr sz="1050">
+                          <a:solidFill>
+                            <a:srgbClr val="142128"/>
+                          </a:solidFill>
+                          <a:latin typeface="Calibri"/>
+                        </a:rPr>
+                        <a:t>WN</a:t>
+                      </a:r>
+                    </a:p>
+                  </a:txBody>
+                  <a:tcPr>
+                    <a:solidFill>
+                      <a:srgbClr val="FFFFFF"/>
+                    </a:solidFill>
+                  </a:tcPr>
+                </a:tc>
+                <a:tc>
+                  <a:txBody>
+                    <a:bodyPr/>
+                    <a:lstStyle/>
+                    <a:p>
+                      <a:r>
+                        <a:rPr sz="1050">
+                          <a:solidFill>
+                            <a:srgbClr val="142128"/>
+                          </a:solidFill>
+                          <a:latin typeface="Calibri"/>
+                        </a:rPr>
+                        <a:t>ATL</a:t>
+                      </a:r>
+                    </a:p>
+                  </a:txBody>
+                  <a:tcPr>
+                    <a:solidFill>
+                      <a:srgbClr val="FFFFFF"/>
+                    </a:solidFill>
+                  </a:tcPr>
+                </a:tc>
+                <a:tc>
+                  <a:txBody>
+                    <a:bodyPr/>
+                    <a:lstStyle/>
+                    <a:p>
+                      <a:r>
+                        <a:rPr sz="1050">
+                          <a:solidFill>
+                            <a:srgbClr val="142128"/>
+                          </a:solidFill>
+                          <a:latin typeface="Calibri"/>
+                        </a:rPr>
+                        <a:t>MDW</a:t>
+                      </a:r>
+                    </a:p>
+                  </a:txBody>
+                  <a:tcPr>
+                    <a:solidFill>
+                      <a:srgbClr val="FFFFFF"/>
+                    </a:solidFill>
+                  </a:tcPr>
+                </a:tc>
+                <a:tc>
+                  <a:txBody>
+                    <a:bodyPr/>
+                    <a:lstStyle/>
+                    <a:p>
+                      <a:r>
+                        <a:rPr sz="1050">
+                          <a:solidFill>
+                            <a:srgbClr val="142128"/>
+                          </a:solidFill>
+                          <a:latin typeface="Calibri"/>
+                        </a:rPr>
+                        <a:t>591</a:t>
+                      </a:r>
+                    </a:p>
+                  </a:txBody>
+                  <a:tcPr>
+                    <a:solidFill>
+                      <a:srgbClr val="FFFFFF"/>
+                    </a:solidFill>
+                  </a:tcPr>
+                </a:tc>
+                <a:tc>
+                  <a:txBody>
+                    <a:bodyPr/>
+                    <a:lstStyle/>
+                    <a:p>
+                      <a:r>
+                        <a:rPr sz="1050">
+                          <a:solidFill>
+                            <a:srgbClr val="142128"/>
+                          </a:solidFill>
+                          <a:latin typeface="Calibri"/>
+                        </a:rPr>
+                        <a:t>-4</a:t>
+                      </a:r>
+                    </a:p>
+                  </a:txBody>
+                  <a:tcPr>
+                    <a:solidFill>
+                      <a:srgbClr val="FFFFFF"/>
+                    </a:solidFill>
+                  </a:tcPr>
+                </a:tc>
+                <a:tc>
+                  <a:txBody>
+                    <a:bodyPr/>
+                    <a:lstStyle/>
+                    <a:p>
+                      <a:r>
+                        <a:rPr sz="1050">
+                          <a:solidFill>
+                            <a:srgbClr val="142128"/>
+                          </a:solidFill>
+                          <a:latin typeface="Calibri"/>
+                        </a:rPr>
+                        <a:t>0</a:t>
+                      </a:r>
+                    </a:p>
+                  </a:txBody>
+                  <a:tcPr>
+                    <a:solidFill>
+                      <a:srgbClr val="FFFFFF"/>
+                    </a:solidFill>
+                  </a:tcPr>
+                </a:tc>
+                <a:tc>
+                  <a:txBody>
+                    <a:bodyPr/>
+                    <a:lstStyle/>
+                    <a:p/>
+                  </a:txBody>
+                  <a:tcPr>
+                    <a:solidFill>
+                      <a:srgbClr val="FFFFFF"/>
+                    </a:solidFill>
+                  </a:tcPr>
+                </a:tc>
+              </a:tr>
+              <a:tr h="301752">
+                <a:tc>
+                  <a:txBody>
+                    <a:bodyPr/>
+                    <a:lstStyle/>
+                    <a:p>
+                      <a:r>
+                        <a:rPr sz="1050">
+                          <a:solidFill>
+                            <a:srgbClr val="142128"/>
+                          </a:solidFill>
+                          <a:latin typeface="Calibri"/>
+                        </a:rPr>
+                        <a:t>01/06/2015</a:t>
+                      </a:r>
+                    </a:p>
+                  </a:txBody>
+                  <a:tcPr>
+                    <a:solidFill>
+                      <a:srgbClr val="F4F7F8"/>
+                    </a:solidFill>
+                  </a:tcPr>
+                </a:tc>
+                <a:tc>
+                  <a:txBody>
+                    <a:bodyPr/>
+                    <a:lstStyle/>
+                    <a:p>
+                      <a:r>
+                        <a:rPr sz="1050">
+                          <a:solidFill>
+                            <a:srgbClr val="142128"/>
+                          </a:solidFill>
+                          <a:latin typeface="Calibri"/>
+                        </a:rPr>
+                        <a:t>NK</a:t>
+                      </a:r>
+                    </a:p>
+                  </a:txBody>
+                  <a:tcPr>
+                    <a:solidFill>
+                      <a:srgbClr val="F4F7F8"/>
+                    </a:solidFill>
+                  </a:tcPr>
+                </a:tc>
+                <a:tc>
+                  <a:txBody>
+                    <a:bodyPr/>
+                    <a:lstStyle/>
+                    <a:p>
+                      <a:r>
+                        <a:rPr sz="1050">
+                          <a:solidFill>
+                            <a:srgbClr val="142128"/>
+                          </a:solidFill>
+                          <a:latin typeface="Calibri"/>
+                        </a:rPr>
+                        <a:t>ORD</a:t>
+                      </a:r>
+                    </a:p>
+                  </a:txBody>
+                  <a:tcPr>
+                    <a:solidFill>
+                      <a:srgbClr val="F4F7F8"/>
+                    </a:solidFill>
+                  </a:tcPr>
+                </a:tc>
+                <a:tc>
+                  <a:txBody>
+                    <a:bodyPr/>
+                    <a:lstStyle/>
+                    <a:p>
+                      <a:r>
+                        <a:rPr sz="1050">
+                          <a:solidFill>
+                            <a:srgbClr val="142128"/>
+                          </a:solidFill>
+                          <a:latin typeface="Calibri"/>
+                        </a:rPr>
+                        <a:t>LGA</a:t>
+                      </a:r>
+                    </a:p>
+                  </a:txBody>
+                  <a:tcPr>
+                    <a:solidFill>
+                      <a:srgbClr val="F4F7F8"/>
+                    </a:solidFill>
+                  </a:tcPr>
+                </a:tc>
+                <a:tc>
+                  <a:txBody>
+                    <a:bodyPr/>
+                    <a:lstStyle/>
+                    <a:p>
+                      <a:r>
+                        <a:rPr sz="1050">
+                          <a:solidFill>
+                            <a:srgbClr val="142128"/>
+                          </a:solidFill>
+                          <a:latin typeface="Calibri"/>
+                        </a:rPr>
+                        <a:t>733</a:t>
+                      </a:r>
+                    </a:p>
+                  </a:txBody>
+                  <a:tcPr>
+                    <a:solidFill>
+                      <a:srgbClr val="F4F7F8"/>
+                    </a:solidFill>
+                  </a:tcPr>
+                </a:tc>
+                <a:tc>
+                  <a:txBody>
+                    <a:bodyPr/>
+                    <a:lstStyle/>
+                    <a:p>
+                      <a:r>
+                        <a:rPr sz="1050">
+                          <a:solidFill>
+                            <a:srgbClr val="142128"/>
+                          </a:solidFill>
+                          <a:latin typeface="Calibri"/>
+                        </a:rPr>
+                        <a:t>+85</a:t>
+                      </a:r>
+                    </a:p>
+                  </a:txBody>
+                  <a:tcPr>
+                    <a:solidFill>
+                      <a:srgbClr val="F4F7F8"/>
+                    </a:solidFill>
+                  </a:tcPr>
+                </a:tc>
+                <a:tc>
+                  <a:txBody>
+                    <a:bodyPr/>
+                    <a:lstStyle/>
+                    <a:p>
+                      <a:r>
+                        <a:rPr sz="1050">
+                          <a:solidFill>
+                            <a:srgbClr val="142128"/>
+                          </a:solidFill>
+                          <a:latin typeface="Calibri"/>
+                        </a:rPr>
+                        <a:t>0</a:t>
+                      </a:r>
+                    </a:p>
+                  </a:txBody>
+                  <a:tcPr>
+                    <a:solidFill>
+                      <a:srgbClr val="F4F7F8"/>
+                    </a:solidFill>
+                  </a:tcPr>
+                </a:tc>
+                <a:tc>
+                  <a:txBody>
+                    <a:bodyPr/>
+                    <a:lstStyle/>
+                    <a:p/>
+                  </a:txBody>
+                  <a:tcPr>
+                    <a:solidFill>
+                      <a:srgbClr val="F4F7F8"/>
+                    </a:solidFill>
+                  </a:tcPr>
+                </a:tc>
+              </a:tr>
+              <a:tr h="301752">
+                <a:tc>
+                  <a:txBody>
+                    <a:bodyPr/>
+                    <a:lstStyle/>
+                    <a:p>
+                      <a:r>
+                        <a:rPr sz="1050">
+                          <a:solidFill>
+                            <a:srgbClr val="142128"/>
+                          </a:solidFill>
+                          <a:latin typeface="Calibri"/>
+                        </a:rPr>
+                        <a:t>01/02/2015</a:t>
+                      </a:r>
+                    </a:p>
+                  </a:txBody>
+                  <a:tcPr>
+                    <a:solidFill>
+                      <a:srgbClr val="FFFFFF"/>
+                    </a:solidFill>
+                  </a:tcPr>
+                </a:tc>
+                <a:tc>
+                  <a:txBody>
+                    <a:bodyPr/>
+                    <a:lstStyle/>
+                    <a:p>
+                      <a:r>
+                        <a:rPr sz="1050">
+                          <a:solidFill>
+                            <a:srgbClr val="142128"/>
+                          </a:solidFill>
+                          <a:latin typeface="Calibri"/>
+                        </a:rPr>
+                        <a:t>B6</a:t>
+                      </a:r>
+                    </a:p>
+                  </a:txBody>
+                  <a:tcPr>
+                    <a:solidFill>
+                      <a:srgbClr val="FFFFFF"/>
+                    </a:solidFill>
+                  </a:tcPr>
+                </a:tc>
+                <a:tc>
+                  <a:txBody>
+                    <a:bodyPr/>
+                    <a:lstStyle/>
+                    <a:p>
+                      <a:r>
+                        <a:rPr sz="1050">
+                          <a:solidFill>
+                            <a:srgbClr val="142128"/>
+                          </a:solidFill>
+                          <a:latin typeface="Calibri"/>
+                        </a:rPr>
+                        <a:t>BOS</a:t>
+                      </a:r>
+                    </a:p>
+                  </a:txBody>
+                  <a:tcPr>
+                    <a:solidFill>
+                      <a:srgbClr val="FFFFFF"/>
+                    </a:solidFill>
+                  </a:tcPr>
+                </a:tc>
+                <a:tc>
+                  <a:txBody>
+                    <a:bodyPr/>
+                    <a:lstStyle/>
+                    <a:p>
+                      <a:r>
+                        <a:rPr sz="1050">
+                          <a:solidFill>
+                            <a:srgbClr val="142128"/>
+                          </a:solidFill>
+                          <a:latin typeface="Calibri"/>
+                        </a:rPr>
+                        <a:t>ORD</a:t>
+                      </a:r>
+                    </a:p>
+                  </a:txBody>
+                  <a:tcPr>
+                    <a:solidFill>
+                      <a:srgbClr val="FFFFFF"/>
+                    </a:solidFill>
+                  </a:tcPr>
+                </a:tc>
+                <a:tc>
+                  <a:txBody>
+                    <a:bodyPr/>
+                    <a:lstStyle/>
+                    <a:p>
+                      <a:r>
+                        <a:rPr sz="1050">
+                          <a:solidFill>
+                            <a:srgbClr val="142128"/>
+                          </a:solidFill>
+                          <a:latin typeface="Calibri"/>
+                        </a:rPr>
+                        <a:t>867</a:t>
+                      </a:r>
+                    </a:p>
+                  </a:txBody>
+                  <a:tcPr>
+                    <a:solidFill>
+                      <a:srgbClr val="FFFFFF"/>
+                    </a:solidFill>
+                  </a:tcPr>
+                </a:tc>
+                <a:tc>
+                  <a:txBody>
+                    <a:bodyPr/>
+                    <a:lstStyle/>
+                    <a:p/>
+                  </a:txBody>
+                  <a:tcPr>
+                    <a:solidFill>
+                      <a:srgbClr val="FFFFFF"/>
+                    </a:solidFill>
+                  </a:tcPr>
+                </a:tc>
+                <a:tc>
+                  <a:txBody>
+                    <a:bodyPr/>
+                    <a:lstStyle/>
+                    <a:p>
+                      <a:r>
+                        <a:rPr sz="1050">
+                          <a:solidFill>
+                            <a:srgbClr val="142128"/>
+                          </a:solidFill>
+                          <a:latin typeface="Calibri"/>
+                        </a:rPr>
+                        <a:t>1</a:t>
+                      </a:r>
+                    </a:p>
+                  </a:txBody>
+                  <a:tcPr>
+                    <a:solidFill>
+                      <a:srgbClr val="FFFFFF"/>
+                    </a:solidFill>
+                  </a:tcPr>
+                </a:tc>
+                <a:tc>
+                  <a:txBody>
+                    <a:bodyPr/>
+                    <a:lstStyle/>
+                    <a:p>
+                      <a:r>
+                        <a:rPr sz="1050">
+                          <a:solidFill>
+                            <a:srgbClr val="142128"/>
+                          </a:solidFill>
+                          <a:latin typeface="Calibri"/>
+                        </a:rPr>
+                        <a:t>B</a:t>
+                      </a:r>
+                    </a:p>
+                  </a:txBody>
+                  <a:tcPr>
+                    <a:solidFill>
+                      <a:srgbClr val="FFFFFF"/>
+                    </a:solidFill>
+                  </a:tcPr>
+                </a:tc>
+              </a:tr>
+              <a:tr h="301752">
+                <a:tc>
+                  <a:txBody>
+                    <a:bodyPr/>
+                    <a:lstStyle/>
+                    <a:p>
+                      <a:r>
+                        <a:rPr sz="1050">
+                          <a:solidFill>
+                            <a:srgbClr val="142128"/>
+                          </a:solidFill>
+                          <a:latin typeface="Calibri"/>
+                        </a:rPr>
+                        <a:t>01/01/2015</a:t>
+                      </a:r>
+                    </a:p>
+                  </a:txBody>
+                  <a:tcPr>
+                    <a:solidFill>
+                      <a:srgbClr val="F4F7F8"/>
+                    </a:solidFill>
+                  </a:tcPr>
+                </a:tc>
+                <a:tc>
+                  <a:txBody>
+                    <a:bodyPr/>
+                    <a:lstStyle/>
+                    <a:p>
+                      <a:r>
+                        <a:rPr sz="1050">
+                          <a:solidFill>
+                            <a:srgbClr val="142128"/>
+                          </a:solidFill>
+                          <a:latin typeface="Calibri"/>
+                        </a:rPr>
+                        <a:t>DL</a:t>
+                      </a:r>
+                    </a:p>
+                  </a:txBody>
+                  <a:tcPr>
+                    <a:solidFill>
+                      <a:srgbClr val="F4F7F8"/>
+                    </a:solidFill>
+                  </a:tcPr>
+                </a:tc>
+                <a:tc>
+                  <a:txBody>
+                    <a:bodyPr/>
+                    <a:lstStyle/>
+                    <a:p>
+                      <a:r>
+                        <a:rPr sz="1050">
+                          <a:solidFill>
+                            <a:srgbClr val="142128"/>
+                          </a:solidFill>
+                          <a:latin typeface="Calibri"/>
+                        </a:rPr>
+                        <a:t>JFK</a:t>
+                      </a:r>
+                    </a:p>
+                  </a:txBody>
+                  <a:tcPr>
+                    <a:solidFill>
+                      <a:srgbClr val="F4F7F8"/>
+                    </a:solidFill>
+                  </a:tcPr>
+                </a:tc>
+                <a:tc>
+                  <a:txBody>
+                    <a:bodyPr/>
+                    <a:lstStyle/>
+                    <a:p>
+                      <a:r>
+                        <a:rPr sz="1050">
+                          <a:solidFill>
+                            <a:srgbClr val="142128"/>
+                          </a:solidFill>
+                          <a:latin typeface="Calibri"/>
+                        </a:rPr>
+                        <a:t>LAX</a:t>
+                      </a:r>
+                    </a:p>
+                  </a:txBody>
+                  <a:tcPr>
+                    <a:solidFill>
+                      <a:srgbClr val="F4F7F8"/>
+                    </a:solidFill>
+                  </a:tcPr>
+                </a:tc>
+                <a:tc>
+                  <a:txBody>
+                    <a:bodyPr/>
+                    <a:lstStyle/>
+                    <a:p>
+                      <a:r>
+                        <a:rPr sz="1050">
+                          <a:solidFill>
+                            <a:srgbClr val="142128"/>
+                          </a:solidFill>
+                          <a:latin typeface="Calibri"/>
+                        </a:rPr>
+                        <a:t>2475</a:t>
+                      </a:r>
+                    </a:p>
+                  </a:txBody>
+                  <a:tcPr>
+                    <a:solidFill>
+                      <a:srgbClr val="F4F7F8"/>
+                    </a:solidFill>
+                  </a:tcPr>
+                </a:tc>
+                <a:tc>
+                  <a:txBody>
+                    <a:bodyPr/>
+                    <a:lstStyle/>
+                    <a:p>
+                      <a:r>
+                        <a:rPr sz="1050">
+                          <a:solidFill>
+                            <a:srgbClr val="142128"/>
+                          </a:solidFill>
+                          <a:latin typeface="Calibri"/>
+                        </a:rPr>
+                        <a:t>-10</a:t>
+                      </a:r>
+                    </a:p>
+                  </a:txBody>
+                  <a:tcPr>
+                    <a:solidFill>
+                      <a:srgbClr val="F4F7F8"/>
+                    </a:solidFill>
+                  </a:tcPr>
+                </a:tc>
+                <a:tc>
+                  <a:txBody>
+                    <a:bodyPr/>
+                    <a:lstStyle/>
+                    <a:p>
+                      <a:r>
+                        <a:rPr sz="1050">
+                          <a:solidFill>
+                            <a:srgbClr val="142128"/>
+                          </a:solidFill>
+                          <a:latin typeface="Calibri"/>
+                        </a:rPr>
+                        <a:t>0</a:t>
+                      </a:r>
+                    </a:p>
+                  </a:txBody>
+                  <a:tcPr>
+                    <a:solidFill>
+                      <a:srgbClr val="F4F7F8"/>
+                    </a:solidFill>
+                  </a:tcPr>
+                </a:tc>
+                <a:tc>
+                  <a:txBody>
+                    <a:bodyPr/>
+                    <a:lstStyle/>
+                    <a:p/>
+                  </a:txBody>
+                  <a:tcPr>
+                    <a:solidFill>
+                      <a:srgbClr val="F4F7F8"/>
+                    </a:solidFill>
+                  </a:tcPr>
+                </a:tc>
+              </a:tr>
+            </a:tbl>
+          </a:graphicData>
+        </a:graphic>
+      </p:graphicFrame>
+      <p:sp>
+        <p:nvSpPr>
+          <p:cNvPr id="32" name="TextBox 31"/>
+          <p:cNvSpPr txBox="1"/>
+          <p:nvPr/>
+        </p:nvSpPr>
+        <p:spPr>
+          <a:xfrm>
+            <a:off x="502920" y="4434840"/>
+            <a:ext cx="11155680" cy="274320"/>
+          </a:xfrm>
+          <a:prstGeom prst="rect">
+            <a:avLst/>
+          </a:prstGeom>
+          <a:noFill/>
+        </p:spPr>
+        <p:txBody>
+          <a:bodyPr wrap="square" anchor="t">
+            <a:spAutoFit/>
+          </a:bodyPr>
+          <a:lstStyle/>
+          <a:p>
+            <a:pPr algn="l">
+              <a:spcAft>
+                <a:spcPts val="400"/>
+              </a:spcAft>
+            </a:pPr>
+            <a:r>
+              <a:rPr sz="1200" b="1">
+                <a:solidFill>
+                  <a:srgbClr val="687985"/>
+                </a:solidFill>
+                <a:latin typeface="Calibri"/>
+              </a:rPr>
+              <a:t>Les colonnes clés :</a:t>
+            </a:r>
+          </a:p>
+        </p:txBody>
+      </p:sp>
+      <p:sp>
+        <p:nvSpPr>
+          <p:cNvPr id="33" name="TextBox 32"/>
+          <p:cNvSpPr txBox="1"/>
+          <p:nvPr/>
+        </p:nvSpPr>
+        <p:spPr>
+          <a:xfrm>
+            <a:off x="502920" y="4736592"/>
+            <a:ext cx="5486400" cy="1645920"/>
+          </a:xfrm>
+          <a:prstGeom prst="rect">
+            <a:avLst/>
+          </a:prstGeom>
+          <a:noFill/>
+        </p:spPr>
+        <p:txBody>
+          <a:bodyPr wrap="square" anchor="t">
+            <a:spAutoFit/>
+          </a:bodyPr>
+          <a:lstStyle/>
+          <a:p>
+            <a:pPr algn="l">
+              <a:lnSpc>
+                <a:spcPct val="105000"/>
+              </a:lnSpc>
+              <a:spcAft>
+                <a:spcPts val="700"/>
+              </a:spcAft>
+            </a:pPr>
+            <a:r>
+              <a:rPr sz="1250" b="1">
+                <a:solidFill>
+                  <a:srgbClr val="0C8792"/>
+                </a:solidFill>
+                <a:latin typeface="Calibri"/>
+              </a:rPr>
+              <a:t>▪  </a:t>
+            </a:r>
+            <a:r>
+              <a:rPr sz="1250" b="1">
+                <a:solidFill>
+                  <a:srgbClr val="075D66"/>
+                </a:solidFill>
+                <a:latin typeface="Calibri"/>
+              </a:rPr>
+              <a:t>AIRLINE</a:t>
+            </a:r>
+            <a:r>
+              <a:rPr sz="1250" b="0">
+                <a:solidFill>
+                  <a:srgbClr val="142128"/>
+                </a:solidFill>
+                <a:latin typeface="Calibri"/>
+              </a:rPr>
+              <a:t> : code de la compagnie aérienne (14 compagnies)</a:t>
+            </a:r>
+          </a:p>
+          <a:p>
+            <a:pPr algn="l">
+              <a:lnSpc>
+                <a:spcPct val="105000"/>
+              </a:lnSpc>
+              <a:spcAft>
+                <a:spcPts val="700"/>
+              </a:spcAft>
+            </a:pPr>
+            <a:r>
+              <a:rPr sz="1250" b="1">
+                <a:solidFill>
+                  <a:srgbClr val="0C8792"/>
+                </a:solidFill>
+                <a:latin typeface="Calibri"/>
+              </a:rPr>
+              <a:t>▪  </a:t>
+            </a:r>
+            <a:r>
+              <a:rPr sz="1250" b="1">
+                <a:solidFill>
+                  <a:srgbClr val="075D66"/>
+                </a:solidFill>
+                <a:latin typeface="Calibri"/>
+              </a:rPr>
+              <a:t>ORIGIN / DESTINATION_AIRPORT</a:t>
+            </a:r>
+            <a:r>
+              <a:rPr sz="1250" b="0">
+                <a:solidFill>
+                  <a:srgbClr val="142128"/>
+                </a:solidFill>
+                <a:latin typeface="Calibri"/>
+              </a:rPr>
+              <a:t> : aéroports de départ et d'arrivée</a:t>
+            </a:r>
+          </a:p>
+          <a:p>
+            <a:pPr algn="l">
+              <a:lnSpc>
+                <a:spcPct val="105000"/>
+              </a:lnSpc>
+              <a:spcAft>
+                <a:spcPts val="700"/>
+              </a:spcAft>
+            </a:pPr>
+            <a:r>
+              <a:rPr sz="1250" b="1">
+                <a:solidFill>
+                  <a:srgbClr val="0C8792"/>
+                </a:solidFill>
+                <a:latin typeface="Calibri"/>
+              </a:rPr>
+              <a:t>▪  </a:t>
+            </a:r>
+            <a:r>
+              <a:rPr sz="1250" b="1">
+                <a:solidFill>
+                  <a:srgbClr val="075D66"/>
+                </a:solidFill>
+                <a:latin typeface="Calibri"/>
+              </a:rPr>
+              <a:t>DISTANCE</a:t>
+            </a:r>
+            <a:r>
+              <a:rPr sz="1250" b="0">
+                <a:solidFill>
+                  <a:srgbClr val="142128"/>
+                </a:solidFill>
+                <a:latin typeface="Calibri"/>
+              </a:rPr>
+              <a:t> : distance du vol en miles (1500 mi et plus = vol long)</a:t>
+            </a:r>
+          </a:p>
+        </p:txBody>
+      </p:sp>
+      <p:sp>
+        <p:nvSpPr>
+          <p:cNvPr id="34" name="TextBox 33"/>
+          <p:cNvSpPr txBox="1"/>
+          <p:nvPr/>
+        </p:nvSpPr>
+        <p:spPr>
+          <a:xfrm>
+            <a:off x="6172200" y="4736592"/>
+            <a:ext cx="5486400" cy="1645920"/>
+          </a:xfrm>
+          <a:prstGeom prst="rect">
+            <a:avLst/>
+          </a:prstGeom>
+          <a:noFill/>
+        </p:spPr>
+        <p:txBody>
+          <a:bodyPr wrap="square" anchor="t">
+            <a:spAutoFit/>
+          </a:bodyPr>
+          <a:lstStyle/>
+          <a:p>
+            <a:pPr algn="l">
+              <a:lnSpc>
+                <a:spcPct val="105000"/>
+              </a:lnSpc>
+              <a:spcAft>
+                <a:spcPts val="700"/>
+              </a:spcAft>
+            </a:pPr>
+            <a:r>
+              <a:rPr sz="1250" b="1">
+                <a:solidFill>
+                  <a:srgbClr val="0C8792"/>
+                </a:solidFill>
+                <a:latin typeface="Calibri"/>
+              </a:rPr>
+              <a:t>▪  </a:t>
+            </a:r>
+            <a:r>
+              <a:rPr sz="1250" b="1">
+                <a:solidFill>
+                  <a:srgbClr val="075D66"/>
+                </a:solidFill>
+                <a:latin typeface="Calibri"/>
+              </a:rPr>
+              <a:t>ARRIVAL_DELAY</a:t>
+            </a:r>
+            <a:r>
+              <a:rPr sz="1250" b="0">
+                <a:solidFill>
+                  <a:srgbClr val="142128"/>
+                </a:solidFill>
+                <a:latin typeface="Calibri"/>
+              </a:rPr>
+              <a:t> : retard à l'arrivée en minutes (négatif = en avance)</a:t>
+            </a:r>
+          </a:p>
+          <a:p>
+            <a:pPr algn="l">
+              <a:lnSpc>
+                <a:spcPct val="105000"/>
+              </a:lnSpc>
+              <a:spcAft>
+                <a:spcPts val="700"/>
+              </a:spcAft>
+            </a:pPr>
+            <a:r>
+              <a:rPr sz="1250" b="1">
+                <a:solidFill>
+                  <a:srgbClr val="0C8792"/>
+                </a:solidFill>
+                <a:latin typeface="Calibri"/>
+              </a:rPr>
+              <a:t>▪  </a:t>
+            </a:r>
+            <a:r>
+              <a:rPr sz="1250" b="1">
+                <a:solidFill>
+                  <a:srgbClr val="075D66"/>
+                </a:solidFill>
+                <a:latin typeface="Calibri"/>
+              </a:rPr>
+              <a:t>CANCELLED + CANCELLATION_REASON</a:t>
+            </a:r>
+            <a:r>
+              <a:rPr sz="1250" b="0">
+                <a:solidFill>
+                  <a:srgbClr val="142128"/>
+                </a:solidFill>
+                <a:latin typeface="Calibri"/>
+              </a:rPr>
+              <a:t> : annulation et son motif (A compagnie, B météo, C contrôle aérien, D sécurité)</a:t>
+            </a:r>
+          </a:p>
+          <a:p>
+            <a:pPr algn="l">
+              <a:lnSpc>
+                <a:spcPct val="105000"/>
+              </a:lnSpc>
+              <a:spcAft>
+                <a:spcPts val="700"/>
+              </a:spcAft>
+            </a:pPr>
+            <a:r>
+              <a:rPr sz="1250" b="1">
+                <a:solidFill>
+                  <a:srgbClr val="0C8792"/>
+                </a:solidFill>
+                <a:latin typeface="Calibri"/>
+              </a:rPr>
+              <a:t>▪  </a:t>
+            </a:r>
+            <a:r>
+              <a:rPr sz="1250" b="1">
+                <a:solidFill>
+                  <a:srgbClr val="075D66"/>
+                </a:solidFill>
+                <a:latin typeface="Calibri"/>
+              </a:rPr>
+              <a:t>WEATHER_DELAY, LATE_AIRCRAFT_DELAY…</a:t>
+            </a:r>
+            <a:r>
+              <a:rPr sz="1250" b="0">
+                <a:solidFill>
+                  <a:srgbClr val="142128"/>
+                </a:solidFill>
+                <a:latin typeface="Calibri"/>
+              </a:rPr>
+              <a:t> : décomposition des minutes de retard par cause</a:t>
+            </a:r>
+          </a:p>
+        </p:txBody>
+      </p:sp>
+      <p:sp>
+        <p:nvSpPr>
+          <p:cNvPr id="37" name="TextBox 36"/>
+          <p:cNvSpPr txBox="1"/>
+          <p:nvPr/>
+        </p:nvSpPr>
+        <p:spPr>
+          <a:xfrm>
+            <a:off x="502920" y="6053328"/>
+            <a:ext cx="11155680" cy="347472"/>
+          </a:xfrm>
+          <a:prstGeom prst="rect">
+            <a:avLst/>
+          </a:prstGeom>
+          <a:noFill/>
+        </p:spPr>
+        <p:txBody>
+          <a:bodyPr wrap="square">
+            <a:spAutoFit/>
+          </a:bodyPr>
+          <a:lstStyle/>
+          <a:p>
+            <a:r>
+              <a:rPr sz="1150" b="1">
+                <a:solidFill>
+                  <a:srgbClr val="075D66"/>
+                </a:solidFill>
+                <a:latin typeface="Calibri"/>
+              </a:rPr>
+              <a:t>Fichiers annexes, joints par le code IATA — </a:t>
+            </a:r>
+            <a:r>
+              <a:rPr sz="1150" b="1">
+                <a:solidFill>
+                  <a:srgbClr val="687985"/>
+                </a:solidFill>
+                <a:latin typeface="Calibri"/>
+              </a:rPr>
+              <a:t>airlines.csv</a:t>
+            </a:r>
+            <a:r>
+              <a:rPr sz="1150" b="0">
+                <a:solidFill>
+                  <a:srgbClr val="687985"/>
+                </a:solidFill>
+                <a:latin typeface="Calibri"/>
+              </a:rPr>
+              <a:t> : code → nom de la compagnie (14 lignes)   ·   </a:t>
+            </a:r>
+            <a:r>
+              <a:rPr sz="1150" b="1">
+                <a:solidFill>
+                  <a:srgbClr val="687985"/>
+                </a:solidFill>
+                <a:latin typeface="Calibri"/>
+              </a:rPr>
+              <a:t>airports.csv</a:t>
+            </a:r>
+            <a:r>
+              <a:rPr sz="1150" b="0">
+                <a:solidFill>
+                  <a:srgbClr val="687985"/>
+                </a:solidFill>
+                <a:latin typeface="Calibri"/>
+              </a:rPr>
+              <a:t> : code, ville, État, latitude/longitude — le fond de la carte (322 lignes)</a:t>
             </a:r>
           </a:p>
         </p:txBody>
@@ -4754,7 +5194,7 @@
       </p:grpSpPr>
       <p:sp>
         <p:nvSpPr>
-          <p:cNvPr id="2" name="Rectangle 1"/>
+          <p:cNvPr id="28" name="Rectangle 27"/>
           <p:cNvSpPr/>
           <p:nvPr/>
         </p:nvSpPr>
@@ -4793,13 +5233,12 @@
           <a:lstStyle/>
           <a:p>
             <a:pPr algn="ctr"/>
-            <a:endParaRPr/>
-          </a:p>
-        </p:txBody>
-      </p:sp>
-      <p:sp>
-        <p:nvSpPr>
-          <p:cNvPr id="3" name="Rectangle 2"/>
+          </a:p>
+        </p:txBody>
+      </p:sp>
+      <p:sp>
+        <p:nvSpPr>
+          <p:cNvPr id="29" name="Rectangle 28"/>
           <p:cNvSpPr/>
           <p:nvPr/>
         </p:nvSpPr>
@@ -4838,7 +5277,6 @@
           <a:lstStyle/>
           <a:p>
             <a:pPr algn="ctr"/>
-            <a:endParaRPr/>
           </a:p>
         </p:txBody>
       </p:sp>
@@ -4876,7 +5314,7 @@
                 </a:solidFill>
                 <a:latin typeface="Calibri"/>
               </a:rPr>
-              <a:t>PRÉPARATION DES DONNÉES</a:t>
+              <a:t>TRAITEMENTS DES DONNÉES</a:t>
             </a:r>
           </a:p>
         </p:txBody>
@@ -4915,215 +5353,7 @@
                 </a:solidFill>
                 <a:latin typeface="Calibri"/>
               </a:rPr>
-              <a:t>Un nettoyage guidé par un audit qualité</a:t>
-            </a:r>
-          </a:p>
-        </p:txBody>
-      </p:sp>
-      <p:sp>
-        <p:nvSpPr>
-          <p:cNvPr id="6" name="TextBox 5"/>
-          <p:cNvSpPr txBox="1"/>
-          <p:nvPr/>
-        </p:nvSpPr>
-        <p:spPr>
-          <a:xfrm>
-            <a:off x="502920" y="1691640"/>
-            <a:ext cx="11155680" cy="4206240"/>
-          </a:xfrm>
-          <a:prstGeom prst="rect">
-            <a:avLst/>
-          </a:prstGeom>
-          <a:noFill/>
-        </p:spPr>
-        <p:txBody>
-          <a:bodyPr wrap="square" anchor="t">
-            <a:spAutoFit/>
-          </a:bodyPr>
-          <a:lstStyle/>
-          <a:p>
-            <a:pPr algn="l">
-              <a:lnSpc>
-                <a:spcPct val="112000"/>
-              </a:lnSpc>
-              <a:spcAft>
-                <a:spcPts val="1200"/>
-              </a:spcAft>
-            </a:pPr>
-            <a:r>
-              <a:rPr sz="1700" b="1" i="0">
-                <a:solidFill>
-                  <a:srgbClr val="0C8792"/>
-                </a:solidFill>
-                <a:latin typeface="Calibri"/>
-              </a:rPr>
-              <a:t>▪  </a:t>
-            </a:r>
-            <a:r>
-              <a:rPr sz="1700" b="1" i="0">
-                <a:solidFill>
-                  <a:srgbClr val="142128"/>
-                </a:solidFill>
-                <a:latin typeface="Calibri"/>
-              </a:rPr>
-              <a:t>Chargement maîtrisé</a:t>
-            </a:r>
-            <a:r>
-              <a:rPr sz="1700" b="0" i="0">
-                <a:solidFill>
-                  <a:srgbClr val="142128"/>
-                </a:solidFill>
-                <a:latin typeface="Calibri"/>
-              </a:rPr>
-              <a:t> — seules les colonnes utiles du fichier de 592 Mo sont lues, avec des types compacts pour tenir en mémoire</a:t>
-            </a:r>
-          </a:p>
-          <a:p>
-            <a:pPr algn="l">
-              <a:lnSpc>
-                <a:spcPct val="112000"/>
-              </a:lnSpc>
-              <a:spcAft>
-                <a:spcPts val="1200"/>
-              </a:spcAft>
-            </a:pPr>
-            <a:r>
-              <a:rPr sz="1700" b="1" i="0">
-                <a:solidFill>
-                  <a:srgbClr val="0C8792"/>
-                </a:solidFill>
-                <a:latin typeface="Calibri"/>
-              </a:rPr>
-              <a:t>▪  </a:t>
-            </a:r>
-            <a:r>
-              <a:rPr sz="1700" b="1" i="0">
-                <a:solidFill>
-                  <a:srgbClr val="142128"/>
-                </a:solidFill>
-                <a:latin typeface="Calibri"/>
-              </a:rPr>
-              <a:t>Valeurs manquantes expliquées</a:t>
-            </a:r>
-            <a:r>
-              <a:rPr sz="1700" b="0" i="0">
-                <a:solidFill>
-                  <a:srgbClr val="142128"/>
-                </a:solidFill>
-                <a:latin typeface="Calibri"/>
-              </a:rPr>
-              <a:t> — 105 071 retards absents correspondent exactement aux vols annulés ou déroutés : ils sont retirés du calcul des retards au lieu d'être comptés « à l'heure »</a:t>
-            </a:r>
-          </a:p>
-          <a:p>
-            <a:pPr algn="l">
-              <a:lnSpc>
-                <a:spcPct val="112000"/>
-              </a:lnSpc>
-              <a:spcAft>
-                <a:spcPts val="1200"/>
-              </a:spcAft>
-            </a:pPr>
-            <a:r>
-              <a:rPr sz="1700" b="1" i="0">
-                <a:solidFill>
-                  <a:srgbClr val="0C8792"/>
-                </a:solidFill>
-                <a:latin typeface="Calibri"/>
-              </a:rPr>
-              <a:t>▪  </a:t>
-            </a:r>
-            <a:r>
-              <a:rPr sz="1700" b="1" i="0">
-                <a:solidFill>
-                  <a:srgbClr val="142128"/>
-                </a:solidFill>
-                <a:latin typeface="Calibri"/>
-              </a:rPr>
-              <a:t>Anomalie détectée sur octobre</a:t>
-            </a:r>
-            <a:r>
-              <a:rPr sz="1700" b="0" i="0">
-                <a:solidFill>
-                  <a:srgbClr val="142128"/>
-                </a:solidFill>
-                <a:latin typeface="Calibri"/>
-              </a:rPr>
-              <a:t> — les aéroports y sont codés différemment du reste de l'année ; le mois est écarté de la seule analyse des liaisons (2,7 % des annulations)</a:t>
-            </a:r>
-          </a:p>
-          <a:p>
-            <a:pPr algn="l">
-              <a:lnSpc>
-                <a:spcPct val="112000"/>
-              </a:lnSpc>
-              <a:spcAft>
-                <a:spcPts val="1200"/>
-              </a:spcAft>
-            </a:pPr>
-            <a:r>
-              <a:rPr sz="1700" b="1" i="0">
-                <a:solidFill>
-                  <a:srgbClr val="0C8792"/>
-                </a:solidFill>
-                <a:latin typeface="Calibri"/>
-              </a:rPr>
-              <a:t>▪  </a:t>
-            </a:r>
-            <a:r>
-              <a:rPr sz="1700" b="1" i="0">
-                <a:solidFill>
-                  <a:srgbClr val="142128"/>
-                </a:solidFill>
-                <a:latin typeface="Calibri"/>
-              </a:rPr>
-              <a:t>Définitions officielles</a:t>
-            </a:r>
-            <a:r>
-              <a:rPr sz="1700" b="0" i="0">
-                <a:solidFill>
-                  <a:srgbClr val="142128"/>
-                </a:solidFill>
-                <a:latin typeface="Calibri"/>
-              </a:rPr>
-              <a:t> — un vol est « en retard » à partir de 15 minutes à l'arrivée (norme du US DOT) ; les périodes de vacances 2015 sont bornées explicitement</a:t>
-            </a:r>
-          </a:p>
-          <a:p>
-            <a:pPr algn="l">
-              <a:lnSpc>
-                <a:spcPct val="112000"/>
-              </a:lnSpc>
-              <a:spcAft>
-                <a:spcPts val="1200"/>
-              </a:spcAft>
-            </a:pPr>
-            <a:r>
-              <a:rPr sz="1700" b="1" i="0">
-                <a:solidFill>
-                  <a:srgbClr val="0C8792"/>
-                </a:solidFill>
-                <a:latin typeface="Calibri"/>
-              </a:rPr>
-              <a:t>▪  </a:t>
-            </a:r>
-            <a:r>
-              <a:rPr sz="1700" b="1" i="0">
-                <a:solidFill>
-                  <a:srgbClr val="142128"/>
-                </a:solidFill>
-                <a:latin typeface="Calibri"/>
-              </a:rPr>
-              <a:t>Résultats reproductibles</a:t>
-            </a:r>
-            <a:r>
-              <a:rPr sz="1700" b="0" i="0">
-                <a:solidFill>
-                  <a:srgbClr val="142128"/>
-                </a:solidFill>
-                <a:latin typeface="Calibri"/>
-              </a:rPr>
-              <a:t> — aucun chiffre saisi à la main : tableaux, graphiques et dashboard sont générés par le notebook, une ré-exécution met tout à jour</a:t>
+              <a:t>De la donnée brute à l'analyse, en trois étapes</a:t>
             </a:r>
           </a:p>
         </p:txBody>
@@ -5202,6 +5432,943 @@
                 <a:latin typeface="Calibri"/>
               </a:rPr>
               <a:t>3</a:t>
+            </a:r>
+          </a:p>
+        </p:txBody>
+      </p:sp>
+      <p:sp>
+        <p:nvSpPr>
+          <p:cNvPr id="30" name="Rounded Rectangle 29"/>
+          <p:cNvSpPr/>
+          <p:nvPr/>
+        </p:nvSpPr>
+        <p:spPr>
+          <a:xfrm>
+            <a:off x="502920" y="1691640"/>
+            <a:ext cx="3401568" cy="4297680"/>
+          </a:xfrm>
+          <a:prstGeom prst="roundRect">
+            <a:avLst>
+              <a:gd name="adj" fmla="val 4000"/>
+            </a:avLst>
+          </a:prstGeom>
+          <a:solidFill>
+            <a:srgbClr val="F4F7F8"/>
+          </a:solidFill>
+          <a:ln w="12700">
+            <a:solidFill>
+              <a:srgbClr val="DCE5E8"/>
+            </a:solidFill>
+          </a:ln>
+          <a:effectLst/>
+        </p:spPr>
+        <p:style>
+          <a:lnRef idx="1">
+            <a:schemeClr val="accent1"/>
+          </a:lnRef>
+          <a:fillRef idx="3">
+            <a:schemeClr val="accent1"/>
+          </a:fillRef>
+          <a:effectRef idx="2">
+            <a:schemeClr val="accent1"/>
+          </a:effectRef>
+          <a:fontRef idx="minor">
+            <a:schemeClr val="lt1"/>
+          </a:fontRef>
+        </p:style>
+        <p:txBody>
+          <a:bodyPr rtlCol="0" anchor="ctr"/>
+          <a:lstStyle/>
+          <a:p>
+            <a:pPr algn="ctr"/>
+          </a:p>
+        </p:txBody>
+      </p:sp>
+      <p:sp>
+        <p:nvSpPr>
+          <p:cNvPr id="31" name="Oval 30"/>
+          <p:cNvSpPr/>
+          <p:nvPr/>
+        </p:nvSpPr>
+        <p:spPr>
+          <a:xfrm>
+            <a:off x="731520" y="1911095"/>
+            <a:ext cx="420624" cy="420624"/>
+          </a:xfrm>
+          <a:prstGeom prst="ellipse">
+            <a:avLst/>
+          </a:prstGeom>
+          <a:solidFill>
+            <a:srgbClr val="0C8792"/>
+          </a:solidFill>
+          <a:ln>
+            <a:noFill/>
+          </a:ln>
+          <a:effectLst/>
+        </p:spPr>
+        <p:style>
+          <a:lnRef idx="1">
+            <a:schemeClr val="accent1"/>
+          </a:lnRef>
+          <a:fillRef idx="3">
+            <a:schemeClr val="accent1"/>
+          </a:fillRef>
+          <a:effectRef idx="2">
+            <a:schemeClr val="accent1"/>
+          </a:effectRef>
+          <a:fontRef idx="minor">
+            <a:schemeClr val="lt1"/>
+          </a:fontRef>
+        </p:style>
+        <p:txBody>
+          <a:bodyPr rtlCol="0" anchor="ctr"/>
+          <a:lstStyle/>
+          <a:p>
+            <a:pPr algn="ctr"/>
+            <a:r>
+              <a:rPr sz="1700" b="1">
+                <a:solidFill>
+                  <a:srgbClr val="FFFFFF"/>
+                </a:solidFill>
+                <a:latin typeface="Calibri"/>
+              </a:rPr>
+              <a:t>1</a:t>
+            </a:r>
+          </a:p>
+        </p:txBody>
+      </p:sp>
+      <p:sp>
+        <p:nvSpPr>
+          <p:cNvPr id="32" name="TextBox 31"/>
+          <p:cNvSpPr txBox="1"/>
+          <p:nvPr/>
+        </p:nvSpPr>
+        <p:spPr>
+          <a:xfrm>
+            <a:off x="1252728" y="1965960"/>
+            <a:ext cx="2487168" cy="384048"/>
+          </a:xfrm>
+          <a:prstGeom prst="rect">
+            <a:avLst/>
+          </a:prstGeom>
+          <a:noFill/>
+        </p:spPr>
+        <p:txBody>
+          <a:bodyPr wrap="square">
+            <a:spAutoFit/>
+          </a:bodyPr>
+          <a:lstStyle/>
+          <a:p>
+            <a:pPr>
+              <a:lnSpc>
+                <a:spcPct val="112000"/>
+              </a:lnSpc>
+              <a:spcAft>
+                <a:spcPts val="700"/>
+              </a:spcAft>
+            </a:pPr>
+            <a:r>
+              <a:rPr sz="1600" b="1">
+                <a:solidFill>
+                  <a:srgbClr val="075D66"/>
+                </a:solidFill>
+                <a:latin typeface="Calibri"/>
+              </a:rPr>
+              <a:t>NETTOYER</a:t>
+            </a:r>
+          </a:p>
+        </p:txBody>
+      </p:sp>
+      <p:sp>
+        <p:nvSpPr>
+          <p:cNvPr id="33" name="TextBox 32"/>
+          <p:cNvSpPr txBox="1"/>
+          <p:nvPr/>
+        </p:nvSpPr>
+        <p:spPr>
+          <a:xfrm>
+            <a:off x="731520" y="2560320"/>
+            <a:ext cx="2944368" cy="3291840"/>
+          </a:xfrm>
+          <a:prstGeom prst="rect">
+            <a:avLst/>
+          </a:prstGeom>
+          <a:noFill/>
+        </p:spPr>
+        <p:txBody>
+          <a:bodyPr wrap="square">
+            <a:spAutoFit/>
+          </a:bodyPr>
+          <a:lstStyle/>
+          <a:p>
+            <a:pPr>
+              <a:lnSpc>
+                <a:spcPct val="112000"/>
+              </a:lnSpc>
+              <a:spcAft>
+                <a:spcPts val="800"/>
+              </a:spcAft>
+            </a:pPr>
+            <a:r>
+              <a:rPr sz="1250" b="1">
+                <a:solidFill>
+                  <a:srgbClr val="0C8792"/>
+                </a:solidFill>
+                <a:latin typeface="Calibri"/>
+              </a:rPr>
+              <a:t>• </a:t>
+            </a:r>
+            <a:r>
+              <a:rPr sz="1250" b="0">
+                <a:solidFill>
+                  <a:srgbClr val="142128"/>
+                </a:solidFill>
+                <a:latin typeface="Calibri"/>
+              </a:rPr>
+              <a:t>105 071 retards manquants identifiés : ce sont les vols annulés ou déroutés → exclus du calcul des retards</a:t>
+            </a:r>
+          </a:p>
+          <a:p>
+            <a:pPr>
+              <a:lnSpc>
+                <a:spcPct val="112000"/>
+              </a:lnSpc>
+              <a:spcAft>
+                <a:spcPts val="800"/>
+              </a:spcAft>
+            </a:pPr>
+            <a:r>
+              <a:rPr sz="1250" b="1">
+                <a:solidFill>
+                  <a:srgbClr val="0C8792"/>
+                </a:solidFill>
+                <a:latin typeface="Calibri"/>
+              </a:rPr>
+              <a:t>• </a:t>
+            </a:r>
+            <a:r>
+              <a:rPr sz="1250" b="0">
+                <a:solidFill>
+                  <a:srgbClr val="142128"/>
+                </a:solidFill>
+                <a:latin typeface="Calibri"/>
+              </a:rPr>
+              <a:t>Codes aéroports incohérents en octobre → mois écarté de la seule analyse des routes (2,7 % des annulations)</a:t>
+            </a:r>
+          </a:p>
+        </p:txBody>
+      </p:sp>
+      <p:sp>
+        <p:nvSpPr>
+          <p:cNvPr id="34" name="Chevron 33"/>
+          <p:cNvSpPr/>
+          <p:nvPr/>
+        </p:nvSpPr>
+        <p:spPr>
+          <a:xfrm>
+            <a:off x="3950208" y="3694176"/>
+            <a:ext cx="292607" cy="292608"/>
+          </a:xfrm>
+          <a:prstGeom prst="chevron">
+            <a:avLst/>
+          </a:prstGeom>
+          <a:solidFill>
+            <a:srgbClr val="0C8792"/>
+          </a:solidFill>
+          <a:ln>
+            <a:noFill/>
+          </a:ln>
+          <a:effectLst/>
+        </p:spPr>
+        <p:style>
+          <a:lnRef idx="1">
+            <a:schemeClr val="accent1"/>
+          </a:lnRef>
+          <a:fillRef idx="3">
+            <a:schemeClr val="accent1"/>
+          </a:fillRef>
+          <a:effectRef idx="2">
+            <a:schemeClr val="accent1"/>
+          </a:effectRef>
+          <a:fontRef idx="minor">
+            <a:schemeClr val="lt1"/>
+          </a:fontRef>
+        </p:style>
+        <p:txBody>
+          <a:bodyPr rtlCol="0" anchor="ctr"/>
+          <a:lstStyle/>
+          <a:p>
+            <a:pPr algn="ctr"/>
+          </a:p>
+        </p:txBody>
+      </p:sp>
+      <p:sp>
+        <p:nvSpPr>
+          <p:cNvPr id="35" name="Rounded Rectangle 34"/>
+          <p:cNvSpPr/>
+          <p:nvPr/>
+        </p:nvSpPr>
+        <p:spPr>
+          <a:xfrm>
+            <a:off x="4288536" y="1691640"/>
+            <a:ext cx="3401568" cy="4297680"/>
+          </a:xfrm>
+          <a:prstGeom prst="roundRect">
+            <a:avLst>
+              <a:gd name="adj" fmla="val 4000"/>
+            </a:avLst>
+          </a:prstGeom>
+          <a:solidFill>
+            <a:srgbClr val="F4F7F8"/>
+          </a:solidFill>
+          <a:ln w="12700">
+            <a:solidFill>
+              <a:srgbClr val="DCE5E8"/>
+            </a:solidFill>
+          </a:ln>
+          <a:effectLst/>
+        </p:spPr>
+        <p:style>
+          <a:lnRef idx="1">
+            <a:schemeClr val="accent1"/>
+          </a:lnRef>
+          <a:fillRef idx="3">
+            <a:schemeClr val="accent1"/>
+          </a:fillRef>
+          <a:effectRef idx="2">
+            <a:schemeClr val="accent1"/>
+          </a:effectRef>
+          <a:fontRef idx="minor">
+            <a:schemeClr val="lt1"/>
+          </a:fontRef>
+        </p:style>
+        <p:txBody>
+          <a:bodyPr rtlCol="0" anchor="ctr"/>
+          <a:lstStyle/>
+          <a:p>
+            <a:pPr algn="ctr"/>
+          </a:p>
+        </p:txBody>
+      </p:sp>
+      <p:sp>
+        <p:nvSpPr>
+          <p:cNvPr id="36" name="Oval 35"/>
+          <p:cNvSpPr/>
+          <p:nvPr/>
+        </p:nvSpPr>
+        <p:spPr>
+          <a:xfrm>
+            <a:off x="4517136" y="1911095"/>
+            <a:ext cx="420624" cy="420624"/>
+          </a:xfrm>
+          <a:prstGeom prst="ellipse">
+            <a:avLst/>
+          </a:prstGeom>
+          <a:solidFill>
+            <a:srgbClr val="0C8792"/>
+          </a:solidFill>
+          <a:ln>
+            <a:noFill/>
+          </a:ln>
+          <a:effectLst/>
+        </p:spPr>
+        <p:style>
+          <a:lnRef idx="1">
+            <a:schemeClr val="accent1"/>
+          </a:lnRef>
+          <a:fillRef idx="3">
+            <a:schemeClr val="accent1"/>
+          </a:fillRef>
+          <a:effectRef idx="2">
+            <a:schemeClr val="accent1"/>
+          </a:effectRef>
+          <a:fontRef idx="minor">
+            <a:schemeClr val="lt1"/>
+          </a:fontRef>
+        </p:style>
+        <p:txBody>
+          <a:bodyPr rtlCol="0" anchor="ctr"/>
+          <a:lstStyle/>
+          <a:p>
+            <a:pPr algn="ctr"/>
+            <a:r>
+              <a:rPr sz="1700" b="1">
+                <a:solidFill>
+                  <a:srgbClr val="FFFFFF"/>
+                </a:solidFill>
+                <a:latin typeface="Calibri"/>
+              </a:rPr>
+              <a:t>2</a:t>
+            </a:r>
+          </a:p>
+        </p:txBody>
+      </p:sp>
+      <p:sp>
+        <p:nvSpPr>
+          <p:cNvPr id="37" name="TextBox 36"/>
+          <p:cNvSpPr txBox="1"/>
+          <p:nvPr/>
+        </p:nvSpPr>
+        <p:spPr>
+          <a:xfrm>
+            <a:off x="5038344" y="1965960"/>
+            <a:ext cx="2487168" cy="384048"/>
+          </a:xfrm>
+          <a:prstGeom prst="rect">
+            <a:avLst/>
+          </a:prstGeom>
+          <a:noFill/>
+        </p:spPr>
+        <p:txBody>
+          <a:bodyPr wrap="square">
+            <a:spAutoFit/>
+          </a:bodyPr>
+          <a:lstStyle/>
+          <a:p>
+            <a:pPr>
+              <a:lnSpc>
+                <a:spcPct val="112000"/>
+              </a:lnSpc>
+              <a:spcAft>
+                <a:spcPts val="700"/>
+              </a:spcAft>
+            </a:pPr>
+            <a:r>
+              <a:rPr sz="1600" b="1">
+                <a:solidFill>
+                  <a:srgbClr val="075D66"/>
+                </a:solidFill>
+                <a:latin typeface="Calibri"/>
+              </a:rPr>
+              <a:t>CONSTRUIRE</a:t>
+            </a:r>
+          </a:p>
+        </p:txBody>
+      </p:sp>
+      <p:sp>
+        <p:nvSpPr>
+          <p:cNvPr id="38" name="TextBox 37"/>
+          <p:cNvSpPr txBox="1"/>
+          <p:nvPr/>
+        </p:nvSpPr>
+        <p:spPr>
+          <a:xfrm>
+            <a:off x="4517136" y="2560320"/>
+            <a:ext cx="2944368" cy="3291840"/>
+          </a:xfrm>
+          <a:prstGeom prst="rect">
+            <a:avLst/>
+          </a:prstGeom>
+          <a:noFill/>
+        </p:spPr>
+        <p:txBody>
+          <a:bodyPr wrap="square">
+            <a:spAutoFit/>
+          </a:bodyPr>
+          <a:lstStyle/>
+          <a:p>
+            <a:pPr>
+              <a:lnSpc>
+                <a:spcPct val="112000"/>
+              </a:lnSpc>
+              <a:spcAft>
+                <a:spcPts val="800"/>
+              </a:spcAft>
+            </a:pPr>
+            <a:r>
+              <a:rPr sz="1250" b="1">
+                <a:solidFill>
+                  <a:srgbClr val="0C8792"/>
+                </a:solidFill>
+                <a:latin typeface="Calibri"/>
+              </a:rPr>
+              <a:t>• </a:t>
+            </a:r>
+            <a:r>
+              <a:rPr sz="1250" b="0">
+                <a:solidFill>
+                  <a:srgbClr val="142128"/>
+                </a:solidFill>
+                <a:latin typeface="Calibri"/>
+              </a:rPr>
+              <a:t>Retard officiel : arrivée à 15 min ou plus (norme US DOT)</a:t>
+            </a:r>
+          </a:p>
+          <a:p>
+            <a:pPr>
+              <a:lnSpc>
+                <a:spcPct val="112000"/>
+              </a:lnSpc>
+              <a:spcAft>
+                <a:spcPts val="800"/>
+              </a:spcAft>
+            </a:pPr>
+            <a:r>
+              <a:rPr sz="1250" b="1">
+                <a:solidFill>
+                  <a:srgbClr val="0C8792"/>
+                </a:solidFill>
+                <a:latin typeface="Calibri"/>
+              </a:rPr>
+              <a:t>• </a:t>
+            </a:r>
+            <a:r>
+              <a:rPr sz="1250" b="0">
+                <a:solidFill>
+                  <a:srgbClr val="142128"/>
+                </a:solidFill>
+                <a:latin typeface="Calibri"/>
+              </a:rPr>
+              <a:t>Vol long : 1500 miles ou plus</a:t>
+            </a:r>
+          </a:p>
+          <a:p>
+            <a:pPr>
+              <a:lnSpc>
+                <a:spcPct val="112000"/>
+              </a:lnSpc>
+              <a:spcAft>
+                <a:spcPts val="800"/>
+              </a:spcAft>
+            </a:pPr>
+            <a:r>
+              <a:rPr sz="1250" b="1">
+                <a:solidFill>
+                  <a:srgbClr val="0C8792"/>
+                </a:solidFill>
+                <a:latin typeface="Calibri"/>
+              </a:rPr>
+              <a:t>• </a:t>
+            </a:r>
+            <a:r>
+              <a:rPr sz="1250" b="0">
+                <a:solidFill>
+                  <a:srgbClr val="142128"/>
+                </a:solidFill>
+                <a:latin typeface="Calibri"/>
+              </a:rPr>
+              <a:t>Fenêtres de vacances 2015 bornées explicitement</a:t>
+            </a:r>
+          </a:p>
+          <a:p>
+            <a:pPr>
+              <a:lnSpc>
+                <a:spcPct val="112000"/>
+              </a:lnSpc>
+              <a:spcAft>
+                <a:spcPts val="800"/>
+              </a:spcAft>
+            </a:pPr>
+            <a:r>
+              <a:rPr sz="1250" b="1">
+                <a:solidFill>
+                  <a:srgbClr val="0C8792"/>
+                </a:solidFill>
+                <a:latin typeface="Calibri"/>
+              </a:rPr>
+              <a:t>• </a:t>
+            </a:r>
+            <a:r>
+              <a:rPr sz="1250" b="0">
+                <a:solidFill>
+                  <a:srgbClr val="142128"/>
+                </a:solidFill>
+                <a:latin typeface="Calibri"/>
+              </a:rPr>
+              <a:t>Routes origine → destination</a:t>
+            </a:r>
+          </a:p>
+        </p:txBody>
+      </p:sp>
+      <p:sp>
+        <p:nvSpPr>
+          <p:cNvPr id="39" name="Chevron 38"/>
+          <p:cNvSpPr/>
+          <p:nvPr/>
+        </p:nvSpPr>
+        <p:spPr>
+          <a:xfrm>
+            <a:off x="7735824" y="3694176"/>
+            <a:ext cx="292607" cy="292608"/>
+          </a:xfrm>
+          <a:prstGeom prst="chevron">
+            <a:avLst/>
+          </a:prstGeom>
+          <a:solidFill>
+            <a:srgbClr val="0C8792"/>
+          </a:solidFill>
+          <a:ln>
+            <a:noFill/>
+          </a:ln>
+          <a:effectLst/>
+        </p:spPr>
+        <p:style>
+          <a:lnRef idx="1">
+            <a:schemeClr val="accent1"/>
+          </a:lnRef>
+          <a:fillRef idx="3">
+            <a:schemeClr val="accent1"/>
+          </a:fillRef>
+          <a:effectRef idx="2">
+            <a:schemeClr val="accent1"/>
+          </a:effectRef>
+          <a:fontRef idx="minor">
+            <a:schemeClr val="lt1"/>
+          </a:fontRef>
+        </p:style>
+        <p:txBody>
+          <a:bodyPr rtlCol="0" anchor="ctr"/>
+          <a:lstStyle/>
+          <a:p>
+            <a:pPr algn="ctr"/>
+          </a:p>
+        </p:txBody>
+      </p:sp>
+      <p:sp>
+        <p:nvSpPr>
+          <p:cNvPr id="40" name="Rounded Rectangle 39"/>
+          <p:cNvSpPr/>
+          <p:nvPr/>
+        </p:nvSpPr>
+        <p:spPr>
+          <a:xfrm>
+            <a:off x="8074152" y="1691640"/>
+            <a:ext cx="3401568" cy="4297680"/>
+          </a:xfrm>
+          <a:prstGeom prst="roundRect">
+            <a:avLst>
+              <a:gd name="adj" fmla="val 4000"/>
+            </a:avLst>
+          </a:prstGeom>
+          <a:solidFill>
+            <a:srgbClr val="F4F7F8"/>
+          </a:solidFill>
+          <a:ln w="12700">
+            <a:solidFill>
+              <a:srgbClr val="DCE5E8"/>
+            </a:solidFill>
+          </a:ln>
+          <a:effectLst/>
+        </p:spPr>
+        <p:style>
+          <a:lnRef idx="1">
+            <a:schemeClr val="accent1"/>
+          </a:lnRef>
+          <a:fillRef idx="3">
+            <a:schemeClr val="accent1"/>
+          </a:fillRef>
+          <a:effectRef idx="2">
+            <a:schemeClr val="accent1"/>
+          </a:effectRef>
+          <a:fontRef idx="minor">
+            <a:schemeClr val="lt1"/>
+          </a:fontRef>
+        </p:style>
+        <p:txBody>
+          <a:bodyPr rtlCol="0" anchor="ctr"/>
+          <a:lstStyle/>
+          <a:p>
+            <a:pPr algn="ctr"/>
+          </a:p>
+        </p:txBody>
+      </p:sp>
+      <p:sp>
+        <p:nvSpPr>
+          <p:cNvPr id="41" name="Oval 40"/>
+          <p:cNvSpPr/>
+          <p:nvPr/>
+        </p:nvSpPr>
+        <p:spPr>
+          <a:xfrm>
+            <a:off x="8302752" y="1911095"/>
+            <a:ext cx="420624" cy="420624"/>
+          </a:xfrm>
+          <a:prstGeom prst="ellipse">
+            <a:avLst/>
+          </a:prstGeom>
+          <a:solidFill>
+            <a:srgbClr val="0C8792"/>
+          </a:solidFill>
+          <a:ln>
+            <a:noFill/>
+          </a:ln>
+          <a:effectLst/>
+        </p:spPr>
+        <p:style>
+          <a:lnRef idx="1">
+            <a:schemeClr val="accent1"/>
+          </a:lnRef>
+          <a:fillRef idx="3">
+            <a:schemeClr val="accent1"/>
+          </a:fillRef>
+          <a:effectRef idx="2">
+            <a:schemeClr val="accent1"/>
+          </a:effectRef>
+          <a:fontRef idx="minor">
+            <a:schemeClr val="lt1"/>
+          </a:fontRef>
+        </p:style>
+        <p:txBody>
+          <a:bodyPr rtlCol="0" anchor="ctr"/>
+          <a:lstStyle/>
+          <a:p>
+            <a:pPr algn="ctr"/>
+            <a:r>
+              <a:rPr sz="1700" b="1">
+                <a:solidFill>
+                  <a:srgbClr val="FFFFFF"/>
+                </a:solidFill>
+                <a:latin typeface="Calibri"/>
+              </a:rPr>
+              <a:t>3</a:t>
+            </a:r>
+          </a:p>
+        </p:txBody>
+      </p:sp>
+      <p:sp>
+        <p:nvSpPr>
+          <p:cNvPr id="42" name="TextBox 41"/>
+          <p:cNvSpPr txBox="1"/>
+          <p:nvPr/>
+        </p:nvSpPr>
+        <p:spPr>
+          <a:xfrm>
+            <a:off x="8823960" y="1965960"/>
+            <a:ext cx="2487168" cy="384048"/>
+          </a:xfrm>
+          <a:prstGeom prst="rect">
+            <a:avLst/>
+          </a:prstGeom>
+          <a:noFill/>
+        </p:spPr>
+        <p:txBody>
+          <a:bodyPr wrap="square">
+            <a:spAutoFit/>
+          </a:bodyPr>
+          <a:lstStyle/>
+          <a:p>
+            <a:pPr>
+              <a:lnSpc>
+                <a:spcPct val="112000"/>
+              </a:lnSpc>
+              <a:spcAft>
+                <a:spcPts val="700"/>
+              </a:spcAft>
+            </a:pPr>
+            <a:r>
+              <a:rPr sz="1600" b="1">
+                <a:solidFill>
+                  <a:srgbClr val="075D66"/>
+                </a:solidFill>
+                <a:latin typeface="Calibri"/>
+              </a:rPr>
+              <a:t>ANALYSER</a:t>
+            </a:r>
+          </a:p>
+        </p:txBody>
+      </p:sp>
+      <p:sp>
+        <p:nvSpPr>
+          <p:cNvPr id="43" name="TextBox 42"/>
+          <p:cNvSpPr txBox="1"/>
+          <p:nvPr/>
+        </p:nvSpPr>
+        <p:spPr>
+          <a:xfrm>
+            <a:off x="8302752" y="2560320"/>
+            <a:ext cx="2944368" cy="3291840"/>
+          </a:xfrm>
+          <a:prstGeom prst="rect">
+            <a:avLst/>
+          </a:prstGeom>
+          <a:noFill/>
+        </p:spPr>
+        <p:txBody>
+          <a:bodyPr wrap="square">
+            <a:spAutoFit/>
+          </a:bodyPr>
+          <a:lstStyle/>
+          <a:p>
+            <a:pPr>
+              <a:lnSpc>
+                <a:spcPct val="110000"/>
+              </a:lnSpc>
+              <a:spcAft>
+                <a:spcPts val="700"/>
+              </a:spcAft>
+            </a:pPr>
+            <a:r>
+              <a:rPr sz="1250" b="1">
+                <a:solidFill>
+                  <a:srgbClr val="0C8792"/>
+                </a:solidFill>
+                <a:latin typeface="Calibri"/>
+              </a:rPr>
+              <a:t>• </a:t>
+            </a:r>
+            <a:r>
+              <a:rPr sz="1250">
+                <a:solidFill>
+                  <a:srgbClr val="142128"/>
+                </a:solidFill>
+                <a:latin typeface="Calibri"/>
+              </a:rPr>
+              <a:t>Agrégations par jour, compagnie et route</a:t>
+            </a:r>
+          </a:p>
+          <a:p>
+            <a:pPr>
+              <a:lnSpc>
+                <a:spcPct val="110000"/>
+              </a:lnSpc>
+              <a:spcAft>
+                <a:spcPts val="700"/>
+              </a:spcAft>
+            </a:pPr>
+            <a:r>
+              <a:rPr sz="1250" b="1">
+                <a:solidFill>
+                  <a:srgbClr val="0C8792"/>
+                </a:solidFill>
+                <a:latin typeface="Calibri"/>
+              </a:rPr>
+              <a:t>• </a:t>
+            </a:r>
+            <a:r>
+              <a:rPr sz="1250">
+                <a:solidFill>
+                  <a:srgbClr val="142128"/>
+                </a:solidFill>
+                <a:latin typeface="Calibri"/>
+              </a:rPr>
+              <a:t>Chaque période de vacances comparée à une référence comparable</a:t>
+            </a:r>
+          </a:p>
+          <a:p>
+            <a:pPr>
+              <a:lnSpc>
+                <a:spcPct val="110000"/>
+              </a:lnSpc>
+              <a:spcAft>
+                <a:spcPts val="700"/>
+              </a:spcAft>
+            </a:pPr>
+            <a:r>
+              <a:rPr sz="1250" b="1">
+                <a:solidFill>
+                  <a:srgbClr val="0C8792"/>
+                </a:solidFill>
+                <a:latin typeface="Calibri"/>
+              </a:rPr>
+              <a:t>• </a:t>
+            </a:r>
+            <a:r>
+              <a:rPr sz="1250">
+                <a:solidFill>
+                  <a:srgbClr val="142128"/>
+                </a:solidFill>
+                <a:latin typeface="Calibri"/>
+              </a:rPr>
+              <a:t>Part des retards portée par les vols longs</a:t>
+            </a:r>
+          </a:p>
+          <a:p>
+            <a:pPr>
+              <a:lnSpc>
+                <a:spcPct val="110000"/>
+              </a:lnSpc>
+              <a:spcAft>
+                <a:spcPts val="700"/>
+              </a:spcAft>
+            </a:pPr>
+            <a:r>
+              <a:rPr sz="1250" b="1">
+                <a:solidFill>
+                  <a:srgbClr val="0C8792"/>
+                </a:solidFill>
+                <a:latin typeface="Calibri"/>
+              </a:rPr>
+              <a:t>• </a:t>
+            </a:r>
+            <a:r>
+              <a:rPr sz="1250">
+                <a:solidFill>
+                  <a:srgbClr val="142128"/>
+                </a:solidFill>
+                <a:latin typeface="Calibri"/>
+              </a:rPr>
+              <a:t>Concentration des annulations rapportée à celle du trafic</a:t>
+            </a:r>
+          </a:p>
+          <a:p>
+            <a:pPr>
+              <a:lnSpc>
+                <a:spcPct val="110000"/>
+              </a:lnSpc>
+              <a:spcAft>
+                <a:spcPts val="700"/>
+              </a:spcAft>
+            </a:pPr>
+            <a:r>
+              <a:rPr sz="1250" b="1">
+                <a:solidFill>
+                  <a:srgbClr val="0C8792"/>
+                </a:solidFill>
+                <a:latin typeface="Calibri"/>
+              </a:rPr>
+              <a:t>• </a:t>
+            </a:r>
+            <a:r>
+              <a:rPr sz="1250">
+                <a:solidFill>
+                  <a:srgbClr val="142128"/>
+                </a:solidFill>
+                <a:latin typeface="Calibri"/>
+              </a:rPr>
+              <a:t>Robustesse : résultats vérifiés sur d'autres seuils et périmètres</a:t>
+            </a:r>
+          </a:p>
+        </p:txBody>
+      </p:sp>
+      <p:sp>
+        <p:nvSpPr>
+          <p:cNvPr id="44" name="TextBox 43"/>
+          <p:cNvSpPr txBox="1"/>
+          <p:nvPr/>
+        </p:nvSpPr>
+        <p:spPr>
+          <a:xfrm>
+            <a:off x="502920" y="6089904"/>
+            <a:ext cx="11155680" cy="320040"/>
+          </a:xfrm>
+          <a:prstGeom prst="rect">
+            <a:avLst/>
+          </a:prstGeom>
+          <a:noFill/>
+        </p:spPr>
+        <p:txBody>
+          <a:bodyPr wrap="square">
+            <a:spAutoFit/>
+          </a:bodyPr>
+          <a:lstStyle/>
+          <a:p>
+            <a:r>
+              <a:rPr sz="1150" b="1">
+                <a:solidFill>
+                  <a:srgbClr val="075D66"/>
+                </a:solidFill>
+                <a:latin typeface="Calibri"/>
+              </a:rPr>
+              <a:t>Volumétrie — </a:t>
+            </a:r>
+            <a:r>
+              <a:rPr sz="1150" b="0">
+                <a:solidFill>
+                  <a:srgbClr val="687985"/>
+                </a:solidFill>
+                <a:latin typeface="Calibri"/>
+              </a:rPr>
+              <a:t>fichier des vols de 592 Mo chargé en types compacts (~350 Mo en mémoire) ; la chaîne complète s'exécute en moins de 2 minutes</a:t>
             </a:r>
           </a:p>
         </p:txBody>
@@ -6062,14 +7229,14 @@
       </p:sp>
       <p:pic>
         <p:nvPicPr>
-          <p:cNvPr id="8" name="Picture 7" descr="capture_finale_accents.png"/>
+          <p:cNvPr id="8" name="Picture 7" descr="capture_slide5_commit2.png"/>
           <p:cNvPicPr>
             <a:picLocks noChangeAspect="1"/>
           </p:cNvPicPr>
           <p:nvPr/>
         </p:nvPicPr>
         <p:blipFill>
-          <a:blip r:embed="rId3"/>
+          <a:blip r:embed="rId2"/>
           <a:stretch>
             <a:fillRect/>
           </a:stretch>
